--- a/Software Specification & Design.pptx
+++ b/Software Specification & Design.pptx
@@ -1540,7 +1540,7 @@
           <a:bodyPr/>
           <a:lstStyle/>
           <a:p>
-            <a:endParaRPr lang="en-US"/>
+            <a:endParaRPr lang="en-US" dirty="0"/>
           </a:p>
         </p:txBody>
       </p:sp>
@@ -1748,12 +1748,20 @@
               </a:defRPr>
             </a:pPr>
             <a:r>
+              <a:rPr lang="de-DE" sz="1350" b="1" dirty="0">
+                <a:solidFill>
+                  <a:srgbClr val="009999"/>
+                </a:solidFill>
+              </a:rPr>
+              <a:t>Software Specification and Design</a:t>
+            </a:r>
+            <a:r>
               <a:rPr sz="1350" b="1" dirty="0">
                 <a:solidFill>
                   <a:srgbClr val="009999"/>
                 </a:solidFill>
               </a:rPr>
-              <a:t>Master's Internship Presentation</a:t>
+              <a:t> Presentation</a:t>
             </a:r>
           </a:p>
         </p:txBody>
@@ -1798,7 +1806,7 @@
               </a:defRPr>
             </a:pPr>
             <a:r>
-              <a:rPr sz="4050" b="1">
+              <a:rPr sz="4050" b="1" dirty="0">
                 <a:solidFill>
                   <a:srgbClr val="083344"/>
                 </a:solidFill>
@@ -1815,7 +1823,7 @@
               </a:defRPr>
             </a:pPr>
             <a:r>
-              <a:rPr sz="4050" b="1">
+              <a:rPr sz="4050" b="1" dirty="0">
                 <a:solidFill>
                   <a:srgbClr val="083344"/>
                 </a:solidFill>
@@ -1841,7 +1849,7 @@
         </p:nvSpPr>
         <p:spPr>
           <a:xfrm>
-            <a:off x="914400" y="3219450"/>
+            <a:off x="914400" y="3076575"/>
             <a:ext cx="6858000" cy="323850"/>
           </a:xfrm>
           <a:prstGeom prst="rect">
@@ -1891,7 +1899,7 @@
         </p:nvSpPr>
         <p:spPr>
           <a:xfrm>
-            <a:off x="914400" y="4857750"/>
+            <a:off x="914400" y="4114800"/>
             <a:ext cx="4762500" cy="304800"/>
           </a:xfrm>
           <a:prstGeom prst="rect">
@@ -1915,7 +1923,7 @@
               </a:defRPr>
             </a:pPr>
             <a:r>
-              <a:rPr sz="1650" b="1">
+              <a:rPr sz="1650" b="1" dirty="0">
                 <a:solidFill>
                   <a:srgbClr val="102A3A"/>
                 </a:solidFill>
@@ -1941,7 +1949,7 @@
         </p:nvSpPr>
         <p:spPr>
           <a:xfrm>
-            <a:off x="914400" y="5219700"/>
+            <a:off x="914400" y="4391025"/>
             <a:ext cx="5334000" cy="266700"/>
           </a:xfrm>
           <a:prstGeom prst="rect">
@@ -1965,7 +1973,7 @@
               </a:defRPr>
             </a:pPr>
             <a:r>
-              <a:rPr sz="1350" b="0">
+              <a:rPr sz="1350" b="0" dirty="0">
                 <a:solidFill>
                   <a:srgbClr val="5B6B78"/>
                 </a:solidFill>
@@ -2015,7 +2023,7 @@
               </a:defRPr>
             </a:pPr>
             <a:r>
-              <a:rPr sz="900" b="0">
+              <a:rPr sz="900" b="0" dirty="0">
                 <a:solidFill>
                   <a:srgbClr val="5B6B78"/>
                 </a:solidFill>
@@ -2075,6 +2083,144 @@
           </a:p>
         </p:txBody>
       </p:sp>
+      <p:sp>
+        <p:nvSpPr>
+          <p:cNvPr id="21" name="Rectangle 20">
+            <a:extLst>
+              <a:ext uri="{FF2B5EF4-FFF2-40B4-BE49-F238E27FC236}">
+                <a16:creationId xmlns:a16="http://schemas.microsoft.com/office/drawing/2014/main" id="{4EEE4452-BA94-A2A2-62C6-94C2827BB41E}"/>
+              </a:ext>
+            </a:extLst>
+          </p:cNvPr>
+          <p:cNvSpPr>
+            <a:spLocks noGrp="1"/>
+          </p:cNvSpPr>
+          <p:nvPr/>
+        </p:nvSpPr>
+        <p:spPr>
+          <a:xfrm>
+            <a:off x="914400" y="4991100"/>
+            <a:ext cx="3830320" cy="1162050"/>
+          </a:xfrm>
+          <a:prstGeom prst="rect">
+            <a:avLst/>
+          </a:prstGeom>
+          <a:noFill/>
+          <a:ln w="0">
+            <a:noFill/>
+            <a:prstDash val="solid"/>
+          </a:ln>
+        </p:spPr>
+        <p:txBody>
+          <a:bodyPr/>
+          <a:lstStyle/>
+          <a:p>
+            <a:pPr algn="l">
+              <a:defRPr sz="1650" b="1">
+                <a:solidFill>
+                  <a:srgbClr val="102A3A"/>
+                </a:solidFill>
+              </a:defRPr>
+            </a:pPr>
+            <a:r>
+              <a:rPr lang="de-DE" sz="1650" b="1" dirty="0">
+                <a:solidFill>
+                  <a:srgbClr val="102A3A"/>
+                </a:solidFill>
+              </a:rPr>
+              <a:t>Prepared By</a:t>
+            </a:r>
+          </a:p>
+          <a:p>
+            <a:pPr>
+              <a:defRPr sz="1650" b="1">
+                <a:solidFill>
+                  <a:srgbClr val="102A3A"/>
+                </a:solidFill>
+              </a:defRPr>
+            </a:pPr>
+            <a:r>
+              <a:rPr lang="de-DE" sz="1400" dirty="0">
+                <a:solidFill>
+                  <a:schemeClr val="tx1">
+                    <a:lumMod val="65000"/>
+                    <a:lumOff val="35000"/>
+                  </a:schemeClr>
+                </a:solidFill>
+              </a:rPr>
+              <a:t>Md Fahim Hossain</a:t>
+            </a:r>
+            <a:br>
+              <a:rPr lang="de-DE" sz="1400" dirty="0">
+                <a:solidFill>
+                  <a:schemeClr val="tx1">
+                    <a:lumMod val="65000"/>
+                    <a:lumOff val="35000"/>
+                  </a:schemeClr>
+                </a:solidFill>
+              </a:rPr>
+            </a:br>
+            <a:r>
+              <a:rPr lang="de-DE" sz="1400" dirty="0">
+                <a:solidFill>
+                  <a:schemeClr val="tx1">
+                    <a:lumMod val="65000"/>
+                    <a:lumOff val="35000"/>
+                  </a:schemeClr>
+                </a:solidFill>
+              </a:rPr>
+              <a:t>Email: </a:t>
+            </a:r>
+            <a:r>
+              <a:rPr lang="en-US" sz="1400" dirty="0">
+                <a:solidFill>
+                  <a:schemeClr val="tx1">
+                    <a:lumMod val="65000"/>
+                    <a:lumOff val="35000"/>
+                  </a:schemeClr>
+                </a:solidFill>
+              </a:rPr>
+              <a:t>md.hossain.4@hof-university.de</a:t>
+            </a:r>
+            <a:endParaRPr sz="1400" dirty="0">
+              <a:solidFill>
+                <a:schemeClr val="tx1">
+                  <a:lumMod val="65000"/>
+                  <a:lumOff val="35000"/>
+                </a:schemeClr>
+              </a:solidFill>
+            </a:endParaRPr>
+          </a:p>
+        </p:txBody>
+      </p:sp>
+      <p:pic>
+        <p:nvPicPr>
+          <p:cNvPr id="5" name="Image 3" descr="A screen shot of a computer  AI-generated content may be incorrect.">
+            <a:extLst>
+              <a:ext uri="{FF2B5EF4-FFF2-40B4-BE49-F238E27FC236}">
+                <a16:creationId xmlns:a16="http://schemas.microsoft.com/office/drawing/2014/main" id="{FF035ADA-1908-8C11-95EE-3A68EE1F4B7A}"/>
+              </a:ext>
+            </a:extLst>
+          </p:cNvPr>
+          <p:cNvPicPr/>
+          <p:nvPr/>
+        </p:nvPicPr>
+        <p:blipFill>
+          <a:blip r:embed="rId6" cstate="print"/>
+          <a:stretch>
+            <a:fillRect/>
+          </a:stretch>
+        </p:blipFill>
+        <p:spPr>
+          <a:xfrm>
+            <a:off x="8426450" y="4000817"/>
+            <a:ext cx="3644900" cy="2132965"/>
+          </a:xfrm>
+          <a:prstGeom prst="rect">
+            <a:avLst/>
+          </a:prstGeom>
+        </p:spPr>
+      </p:pic>
     </p:spTree>
     <p:extLst>
       <p:ext uri="{BB962C8B-B14F-4D97-AF65-F5344CB8AC3E}">
@@ -3023,6 +3169,42 @@
           </a:p>
         </p:txBody>
       </p:sp>
+      <p:pic>
+        <p:nvPicPr>
+          <p:cNvPr id="11" name="Picture 10">
+            <a:extLst>
+              <a:ext uri="{FF2B5EF4-FFF2-40B4-BE49-F238E27FC236}">
+                <a16:creationId xmlns:a16="http://schemas.microsoft.com/office/drawing/2014/main" id="{C7667823-285F-B107-02EE-26683B29C008}"/>
+              </a:ext>
+            </a:extLst>
+          </p:cNvPr>
+          <p:cNvPicPr>
+            <a:picLocks noChangeAspect="1"/>
+          </p:cNvPicPr>
+          <p:nvPr/>
+        </p:nvPicPr>
+        <p:blipFill>
+          <a:blip r:embed="rId8">
+            <a:extLst>
+              <a:ext uri="{28A0092B-C50C-407E-A947-70E740481C1C}">
+                <a14:useLocalDpi xmlns:a14="http://schemas.microsoft.com/office/drawing/2010/main" val="0"/>
+              </a:ext>
+            </a:extLst>
+          </a:blip>
+          <a:stretch>
+            <a:fillRect/>
+          </a:stretch>
+        </p:blipFill>
+        <p:spPr>
+          <a:xfrm>
+            <a:off x="10820400" y="326316"/>
+            <a:ext cx="1156607" cy="397584"/>
+          </a:xfrm>
+          <a:prstGeom prst="rect">
+            <a:avLst/>
+          </a:prstGeom>
+        </p:spPr>
+      </p:pic>
     </p:spTree>
     <p:extLst>
       <p:ext uri="{BB962C8B-B14F-4D97-AF65-F5344CB8AC3E}">
@@ -3661,7 +3843,7 @@
         </p:nvSpPr>
         <p:spPr>
           <a:xfrm>
-            <a:off x="1752600" y="1704975"/>
+            <a:off x="1714500" y="1666875"/>
             <a:ext cx="2000250" cy="285750"/>
           </a:xfrm>
           <a:prstGeom prst="rect">
@@ -3685,7 +3867,15 @@
               </a:defRPr>
             </a:pPr>
             <a:r>
-              <a:rPr sz="1650" b="1">
+              <a:rPr lang="de-DE" sz="1650" b="1" dirty="0">
+                <a:solidFill>
+                  <a:srgbClr val="083344"/>
+                </a:solidFill>
+              </a:rPr>
+              <a:t>1. </a:t>
+            </a:r>
+            <a:r>
+              <a:rPr sz="1650" b="1" dirty="0">
                 <a:solidFill>
                   <a:srgbClr val="083344"/>
                 </a:solidFill>
@@ -3712,7 +3902,7 @@
         <p:spPr>
           <a:xfrm>
             <a:off x="4857750" y="1485900"/>
-            <a:ext cx="3048000" cy="723900"/>
+            <a:ext cx="3343858" cy="723900"/>
           </a:xfrm>
           <a:prstGeom prst="roundRect">
             <a:avLst>
@@ -3793,7 +3983,7 @@
         </p:nvSpPr>
         <p:spPr>
           <a:xfrm>
-            <a:off x="5562600" y="1704975"/>
+            <a:off x="5524500" y="1666875"/>
             <a:ext cx="2000250" cy="285750"/>
           </a:xfrm>
           <a:prstGeom prst="rect">
@@ -3817,7 +4007,15 @@
               </a:defRPr>
             </a:pPr>
             <a:r>
-              <a:rPr sz="1650" b="1">
+              <a:rPr lang="de-DE" sz="1650" b="1" dirty="0">
+                <a:solidFill>
+                  <a:srgbClr val="083344"/>
+                </a:solidFill>
+              </a:rPr>
+              <a:t>2. </a:t>
+            </a:r>
+            <a:r>
+              <a:rPr sz="1650" b="1" dirty="0">
                 <a:solidFill>
                   <a:srgbClr val="083344"/>
                 </a:solidFill>
@@ -3925,7 +4123,7 @@
         </p:nvSpPr>
         <p:spPr>
           <a:xfrm>
-            <a:off x="1752600" y="2600325"/>
+            <a:off x="1714500" y="2562225"/>
             <a:ext cx="2000250" cy="285750"/>
           </a:xfrm>
           <a:prstGeom prst="rect">
@@ -3949,7 +4147,15 @@
               </a:defRPr>
             </a:pPr>
             <a:r>
-              <a:rPr sz="1650" b="1">
+              <a:rPr lang="de-DE" sz="1650" b="1" dirty="0">
+                <a:solidFill>
+                  <a:srgbClr val="083344"/>
+                </a:solidFill>
+              </a:rPr>
+              <a:t>3. </a:t>
+            </a:r>
+            <a:r>
+              <a:rPr sz="1650" b="1" dirty="0">
                 <a:solidFill>
                   <a:srgbClr val="083344"/>
                 </a:solidFill>
@@ -3976,7 +4182,7 @@
         <p:spPr>
           <a:xfrm>
             <a:off x="4857750" y="2381250"/>
-            <a:ext cx="3048000" cy="723900"/>
+            <a:ext cx="3343858" cy="723900"/>
           </a:xfrm>
           <a:prstGeom prst="roundRect">
             <a:avLst>
@@ -4057,7 +4263,7 @@
         </p:nvSpPr>
         <p:spPr>
           <a:xfrm>
-            <a:off x="5562600" y="2600325"/>
+            <a:off x="5524500" y="2562225"/>
             <a:ext cx="2000250" cy="285750"/>
           </a:xfrm>
           <a:prstGeom prst="rect">
@@ -4081,7 +4287,15 @@
               </a:defRPr>
             </a:pPr>
             <a:r>
-              <a:rPr sz="1650" b="1">
+              <a:rPr lang="de-DE" sz="1650" b="1" dirty="0">
+                <a:solidFill>
+                  <a:srgbClr val="083344"/>
+                </a:solidFill>
+              </a:rPr>
+              <a:t>4. </a:t>
+            </a:r>
+            <a:r>
+              <a:rPr sz="1650" b="1" dirty="0">
                 <a:solidFill>
                   <a:srgbClr val="083344"/>
                 </a:solidFill>
@@ -4189,7 +4403,7 @@
         </p:nvSpPr>
         <p:spPr>
           <a:xfrm>
-            <a:off x="1752600" y="3495675"/>
+            <a:off x="1714500" y="3457575"/>
             <a:ext cx="2000250" cy="285750"/>
           </a:xfrm>
           <a:prstGeom prst="rect">
@@ -4213,7 +4427,15 @@
               </a:defRPr>
             </a:pPr>
             <a:r>
-              <a:rPr sz="1650" b="1">
+              <a:rPr lang="de-DE" sz="1650" b="1" dirty="0">
+                <a:solidFill>
+                  <a:srgbClr val="083344"/>
+                </a:solidFill>
+              </a:rPr>
+              <a:t>5. </a:t>
+            </a:r>
+            <a:r>
+              <a:rPr sz="1650" b="1" dirty="0">
                 <a:solidFill>
                   <a:srgbClr val="083344"/>
                 </a:solidFill>
@@ -4240,7 +4462,7 @@
         <p:spPr>
           <a:xfrm>
             <a:off x="4857750" y="3276600"/>
-            <a:ext cx="3048000" cy="723900"/>
+            <a:ext cx="3343858" cy="723900"/>
           </a:xfrm>
           <a:prstGeom prst="roundRect">
             <a:avLst>
@@ -4321,7 +4543,7 @@
         </p:nvSpPr>
         <p:spPr>
           <a:xfrm>
-            <a:off x="5562600" y="3476625"/>
+            <a:off x="5524500" y="3438525"/>
             <a:ext cx="2343150" cy="285750"/>
           </a:xfrm>
           <a:prstGeom prst="rect">
@@ -4344,6 +4566,14 @@
                 </a:solidFill>
               </a:defRPr>
             </a:pPr>
+            <a:r>
+              <a:rPr lang="de-DE" sz="1650" b="1" dirty="0">
+                <a:solidFill>
+                  <a:srgbClr val="083344"/>
+                </a:solidFill>
+              </a:rPr>
+              <a:t>6. </a:t>
+            </a:r>
             <a:r>
               <a:rPr sz="1650" b="1" dirty="0">
                 <a:solidFill>
@@ -4453,7 +4683,7 @@
         </p:nvSpPr>
         <p:spPr>
           <a:xfrm>
-            <a:off x="1752600" y="4391025"/>
+            <a:off x="1714500" y="4352925"/>
             <a:ext cx="2000250" cy="285750"/>
           </a:xfrm>
           <a:prstGeom prst="rect">
@@ -4477,7 +4707,15 @@
               </a:defRPr>
             </a:pPr>
             <a:r>
-              <a:rPr sz="1650" b="1">
+              <a:rPr lang="de-DE" sz="1650" b="1" dirty="0">
+                <a:solidFill>
+                  <a:srgbClr val="083344"/>
+                </a:solidFill>
+              </a:rPr>
+              <a:t>7. </a:t>
+            </a:r>
+            <a:r>
+              <a:rPr sz="1650" b="1" dirty="0">
                 <a:solidFill>
                   <a:srgbClr val="083344"/>
                 </a:solidFill>
@@ -4587,6 +4825,42 @@
           </a:p>
         </p:txBody>
       </p:sp>
+      <p:pic>
+        <p:nvPicPr>
+          <p:cNvPr id="11" name="Picture 10">
+            <a:extLst>
+              <a:ext uri="{FF2B5EF4-FFF2-40B4-BE49-F238E27FC236}">
+                <a16:creationId xmlns:a16="http://schemas.microsoft.com/office/drawing/2014/main" id="{AD064697-FAB0-2827-97B7-3C4ABB8DCA5C}"/>
+              </a:ext>
+            </a:extLst>
+          </p:cNvPr>
+          <p:cNvPicPr>
+            <a:picLocks noChangeAspect="1"/>
+          </p:cNvPicPr>
+          <p:nvPr/>
+        </p:nvPicPr>
+        <p:blipFill>
+          <a:blip r:embed="rId10">
+            <a:extLst>
+              <a:ext uri="{28A0092B-C50C-407E-A947-70E740481C1C}">
+                <a14:useLocalDpi xmlns:a14="http://schemas.microsoft.com/office/drawing/2010/main" val="0"/>
+              </a:ext>
+            </a:extLst>
+          </a:blip>
+          <a:stretch>
+            <a:fillRect/>
+          </a:stretch>
+        </p:blipFill>
+        <p:spPr>
+          <a:xfrm>
+            <a:off x="10820400" y="326316"/>
+            <a:ext cx="1156607" cy="397584"/>
+          </a:xfrm>
+          <a:prstGeom prst="rect">
+            <a:avLst/>
+          </a:prstGeom>
+        </p:spPr>
+      </p:pic>
     </p:spTree>
     <p:extLst>
       <p:ext uri="{BB962C8B-B14F-4D97-AF65-F5344CB8AC3E}">
@@ -4838,7 +5112,7 @@
         </p:nvSpPr>
         <p:spPr>
           <a:xfrm>
-            <a:off x="990600" y="1733550"/>
+            <a:off x="990600" y="1771650"/>
             <a:ext cx="495300" cy="495300"/>
           </a:xfrm>
           <a:prstGeom prst="ellipse">
@@ -4882,7 +5156,7 @@
         </p:blipFill>
         <p:spPr>
           <a:xfrm>
-            <a:off x="1114425" y="1857375"/>
+            <a:off x="1114425" y="1895475"/>
             <a:ext cx="247650" cy="247650"/>
           </a:xfrm>
           <a:prstGeom prst="rect">
@@ -5060,7 +5334,7 @@
         </p:nvSpPr>
         <p:spPr>
           <a:xfrm>
-            <a:off x="990600" y="3143250"/>
+            <a:off x="990600" y="3181350"/>
             <a:ext cx="495300" cy="495300"/>
           </a:xfrm>
           <a:prstGeom prst="ellipse">
@@ -5104,7 +5378,7 @@
         </p:blipFill>
         <p:spPr>
           <a:xfrm>
-            <a:off x="1114425" y="3267075"/>
+            <a:off x="1114425" y="3305175"/>
             <a:ext cx="247650" cy="247650"/>
           </a:xfrm>
           <a:prstGeom prst="rect">
@@ -5282,7 +5556,7 @@
         </p:nvSpPr>
         <p:spPr>
           <a:xfrm>
-            <a:off x="990600" y="4552950"/>
+            <a:off x="990600" y="4591050"/>
             <a:ext cx="495300" cy="495300"/>
           </a:xfrm>
           <a:prstGeom prst="ellipse">
@@ -5326,7 +5600,7 @@
         </p:blipFill>
         <p:spPr>
           <a:xfrm>
-            <a:off x="1114425" y="4676775"/>
+            <a:off x="1114425" y="4714875"/>
             <a:ext cx="247650" cy="247650"/>
           </a:xfrm>
           <a:prstGeom prst="rect">
@@ -5424,13 +5698,26 @@
               </a:defRPr>
             </a:pPr>
             <a:r>
-              <a:rPr sz="1275" b="0">
+              <a:rPr sz="1275" b="0" dirty="0">
                 <a:solidFill>
                   <a:srgbClr val="5B6B78"/>
                 </a:solidFill>
               </a:rPr>
-              <a:t>Software engineering and documentation</a:t>
-            </a:r>
+              <a:t>Software engineering and</a:t>
+            </a:r>
+            <a:r>
+              <a:rPr lang="de-DE" sz="1275" b="0" dirty="0">
+                <a:solidFill>
+                  <a:srgbClr val="5B6B78"/>
+                </a:solidFill>
+              </a:rPr>
+              <a:t> digitalization</a:t>
+            </a:r>
+            <a:endParaRPr sz="1275" b="0" dirty="0">
+              <a:solidFill>
+                <a:srgbClr val="5B6B78"/>
+              </a:solidFill>
+            </a:endParaRPr>
           </a:p>
         </p:txBody>
       </p:sp>
@@ -5528,13 +5815,26 @@
               </a:defRPr>
             </a:pPr>
             <a:r>
-              <a:rPr sz="2100" b="1">
+              <a:rPr sz="2100" b="1" dirty="0">
                 <a:solidFill>
                   <a:srgbClr val="083344"/>
                 </a:solidFill>
               </a:rPr>
-              <a:t>Project Environment</a:t>
-            </a:r>
+              <a:t>Project </a:t>
+            </a:r>
+            <a:r>
+              <a:rPr lang="de-DE" sz="2100" b="1" dirty="0">
+                <a:solidFill>
+                  <a:srgbClr val="083344"/>
+                </a:solidFill>
+              </a:rPr>
+              <a:t>Scope</a:t>
+            </a:r>
+            <a:endParaRPr sz="2100" b="1" dirty="0">
+              <a:solidFill>
+                <a:srgbClr val="083344"/>
+              </a:solidFill>
+            </a:endParaRPr>
           </a:p>
         </p:txBody>
       </p:sp>
@@ -5624,7 +5924,7 @@
         </p:nvSpPr>
         <p:spPr>
           <a:xfrm>
-            <a:off x="7143750" y="2724150"/>
+            <a:off x="7143750" y="2695575"/>
             <a:ext cx="2933700" cy="247650"/>
           </a:xfrm>
           <a:prstGeom prst="rect">
@@ -5648,7 +5948,7 @@
               </a:defRPr>
             </a:pPr>
             <a:r>
-              <a:rPr sz="1275" b="1">
+              <a:rPr sz="1275" b="1" dirty="0">
                 <a:solidFill>
                   <a:srgbClr val="083344"/>
                 </a:solidFill>
@@ -5744,7 +6044,7 @@
         </p:nvSpPr>
         <p:spPr>
           <a:xfrm>
-            <a:off x="7143750" y="3276600"/>
+            <a:off x="7143750" y="3248025"/>
             <a:ext cx="2933700" cy="247650"/>
           </a:xfrm>
           <a:prstGeom prst="rect">
@@ -5768,7 +6068,7 @@
               </a:defRPr>
             </a:pPr>
             <a:r>
-              <a:rPr sz="1275" b="1">
+              <a:rPr sz="1275" b="1" dirty="0">
                 <a:solidFill>
                   <a:srgbClr val="083344"/>
                 </a:solidFill>
@@ -5864,7 +6164,7 @@
         </p:nvSpPr>
         <p:spPr>
           <a:xfrm>
-            <a:off x="7143750" y="3829050"/>
+            <a:off x="7143750" y="3800475"/>
             <a:ext cx="2933700" cy="247650"/>
           </a:xfrm>
           <a:prstGeom prst="rect">
@@ -5888,7 +6188,7 @@
               </a:defRPr>
             </a:pPr>
             <a:r>
-              <a:rPr sz="1275" b="1">
+              <a:rPr sz="1275" b="1" dirty="0">
                 <a:solidFill>
                   <a:srgbClr val="083344"/>
                 </a:solidFill>
@@ -5984,7 +6284,7 @@
         </p:nvSpPr>
         <p:spPr>
           <a:xfrm>
-            <a:off x="7143750" y="4381500"/>
+            <a:off x="7143750" y="4352925"/>
             <a:ext cx="2933700" cy="247650"/>
           </a:xfrm>
           <a:prstGeom prst="rect">
@@ -6008,7 +6308,7 @@
               </a:defRPr>
             </a:pPr>
             <a:r>
-              <a:rPr sz="1275" b="1">
+              <a:rPr sz="1275" b="1" dirty="0">
                 <a:solidFill>
                   <a:srgbClr val="083344"/>
                 </a:solidFill>
@@ -6118,6 +6418,42 @@
           </a:p>
         </p:txBody>
       </p:sp>
+      <p:pic>
+        <p:nvPicPr>
+          <p:cNvPr id="16" name="Picture 15">
+            <a:extLst>
+              <a:ext uri="{FF2B5EF4-FFF2-40B4-BE49-F238E27FC236}">
+                <a16:creationId xmlns:a16="http://schemas.microsoft.com/office/drawing/2014/main" id="{EE356E3A-5427-8C93-AA01-A5FE2C91C6EB}"/>
+              </a:ext>
+            </a:extLst>
+          </p:cNvPr>
+          <p:cNvPicPr>
+            <a:picLocks noChangeAspect="1"/>
+          </p:cNvPicPr>
+          <p:nvPr/>
+        </p:nvPicPr>
+        <p:blipFill>
+          <a:blip r:embed="rId10">
+            <a:extLst>
+              <a:ext uri="{28A0092B-C50C-407E-A947-70E740481C1C}">
+                <a14:useLocalDpi xmlns:a14="http://schemas.microsoft.com/office/drawing/2010/main" val="0"/>
+              </a:ext>
+            </a:extLst>
+          </a:blip>
+          <a:stretch>
+            <a:fillRect/>
+          </a:stretch>
+        </p:blipFill>
+        <p:spPr>
+          <a:xfrm>
+            <a:off x="10820400" y="326316"/>
+            <a:ext cx="1156607" cy="397584"/>
+          </a:xfrm>
+          <a:prstGeom prst="rect">
+            <a:avLst/>
+          </a:prstGeom>
+        </p:spPr>
+      </p:pic>
     </p:spTree>
     <p:extLst>
       <p:ext uri="{BB962C8B-B14F-4D97-AF65-F5344CB8AC3E}">
@@ -6409,7 +6745,7 @@
         </p:nvSpPr>
         <p:spPr>
           <a:xfrm>
-            <a:off x="857250" y="2162175"/>
+            <a:off x="857250" y="2152650"/>
             <a:ext cx="400050" cy="228600"/>
           </a:xfrm>
           <a:prstGeom prst="rect">
@@ -6433,7 +6769,7 @@
               </a:defRPr>
             </a:pPr>
             <a:r>
-              <a:rPr sz="1350" b="1">
+              <a:rPr sz="1350" b="1" dirty="0">
                 <a:solidFill>
                   <a:srgbClr val="FFFFFF"/>
                 </a:solidFill>
@@ -6587,7 +6923,7 @@
         </p:nvSpPr>
         <p:spPr>
           <a:xfrm>
-            <a:off x="3257550" y="2743200"/>
+            <a:off x="3019425" y="2743200"/>
             <a:ext cx="438150" cy="266700"/>
           </a:xfrm>
           <a:prstGeom prst="rightArrow">
@@ -6721,7 +7057,7 @@
         </p:nvSpPr>
         <p:spPr>
           <a:xfrm>
-            <a:off x="3638550" y="2162175"/>
+            <a:off x="3638550" y="2152650"/>
             <a:ext cx="400050" cy="228600"/>
           </a:xfrm>
           <a:prstGeom prst="rect">
@@ -6745,7 +7081,7 @@
               </a:defRPr>
             </a:pPr>
             <a:r>
-              <a:rPr sz="1350" b="1">
+              <a:rPr sz="1350" b="1" dirty="0">
                 <a:solidFill>
                   <a:srgbClr val="FFFFFF"/>
                 </a:solidFill>
@@ -6899,7 +7235,7 @@
         </p:nvSpPr>
         <p:spPr>
           <a:xfrm>
-            <a:off x="6038850" y="2743200"/>
+            <a:off x="5791200" y="2743200"/>
             <a:ext cx="438150" cy="266700"/>
           </a:xfrm>
           <a:prstGeom prst="rightArrow">
@@ -7033,7 +7369,7 @@
         </p:nvSpPr>
         <p:spPr>
           <a:xfrm>
-            <a:off x="6419850" y="2162175"/>
+            <a:off x="6419850" y="2152650"/>
             <a:ext cx="400050" cy="228600"/>
           </a:xfrm>
           <a:prstGeom prst="rect">
@@ -7057,7 +7393,7 @@
               </a:defRPr>
             </a:pPr>
             <a:r>
-              <a:rPr sz="1350" b="1">
+              <a:rPr sz="1350" b="1" dirty="0">
                 <a:solidFill>
                   <a:srgbClr val="FFFFFF"/>
                 </a:solidFill>
@@ -7211,7 +7547,7 @@
         </p:nvSpPr>
         <p:spPr>
           <a:xfrm>
-            <a:off x="8820150" y="2743200"/>
+            <a:off x="8582025" y="2743200"/>
             <a:ext cx="438150" cy="266700"/>
           </a:xfrm>
           <a:prstGeom prst="rightArrow">
@@ -7345,7 +7681,7 @@
         </p:nvSpPr>
         <p:spPr>
           <a:xfrm>
-            <a:off x="9201150" y="2162175"/>
+            <a:off x="9201150" y="2152650"/>
             <a:ext cx="400050" cy="228600"/>
           </a:xfrm>
           <a:prstGeom prst="rect">
@@ -7369,7 +7705,7 @@
               </a:defRPr>
             </a:pPr>
             <a:r>
-              <a:rPr sz="1350" b="1">
+              <a:rPr sz="1350" b="1" dirty="0">
                 <a:solidFill>
                   <a:srgbClr val="FFFFFF"/>
                 </a:solidFill>
@@ -7707,6 +8043,42 @@
           </a:p>
         </p:txBody>
       </p:sp>
+      <p:pic>
+        <p:nvPicPr>
+          <p:cNvPr id="21" name="Picture 20">
+            <a:extLst>
+              <a:ext uri="{FF2B5EF4-FFF2-40B4-BE49-F238E27FC236}">
+                <a16:creationId xmlns:a16="http://schemas.microsoft.com/office/drawing/2014/main" id="{90A36EA1-D9F9-942B-243A-B64AE0A8BD4B}"/>
+              </a:ext>
+            </a:extLst>
+          </p:cNvPr>
+          <p:cNvPicPr>
+            <a:picLocks noChangeAspect="1"/>
+          </p:cNvPicPr>
+          <p:nvPr/>
+        </p:nvPicPr>
+        <p:blipFill>
+          <a:blip r:embed="rId7">
+            <a:extLst>
+              <a:ext uri="{28A0092B-C50C-407E-A947-70E740481C1C}">
+                <a14:useLocalDpi xmlns:a14="http://schemas.microsoft.com/office/drawing/2010/main" val="0"/>
+              </a:ext>
+            </a:extLst>
+          </a:blip>
+          <a:stretch>
+            <a:fillRect/>
+          </a:stretch>
+        </p:blipFill>
+        <p:spPr>
+          <a:xfrm>
+            <a:off x="10820400" y="326316"/>
+            <a:ext cx="1156607" cy="397584"/>
+          </a:xfrm>
+          <a:prstGeom prst="rect">
+            <a:avLst/>
+          </a:prstGeom>
+        </p:spPr>
+      </p:pic>
     </p:spTree>
     <p:extLst>
       <p:ext uri="{BB962C8B-B14F-4D97-AF65-F5344CB8AC3E}">
@@ -8078,7 +8450,7 @@
         </p:nvSpPr>
         <p:spPr>
           <a:xfrm>
-            <a:off x="1638300" y="2686050"/>
+            <a:off x="1638300" y="2667000"/>
             <a:ext cx="2076450" cy="247650"/>
           </a:xfrm>
           <a:prstGeom prst="rect">
@@ -8102,7 +8474,7 @@
               </a:defRPr>
             </a:pPr>
             <a:r>
-              <a:rPr sz="1275" b="1">
+              <a:rPr sz="1275" b="1" dirty="0">
                 <a:solidFill>
                   <a:srgbClr val="083344"/>
                 </a:solidFill>
@@ -8198,7 +8570,7 @@
         </p:nvSpPr>
         <p:spPr>
           <a:xfrm>
-            <a:off x="1638300" y="3381068"/>
+            <a:off x="1638300" y="3362018"/>
             <a:ext cx="2076450" cy="247650"/>
           </a:xfrm>
           <a:prstGeom prst="rect">
@@ -8318,7 +8690,7 @@
         </p:nvSpPr>
         <p:spPr>
           <a:xfrm>
-            <a:off x="1638300" y="4085918"/>
+            <a:off x="1638300" y="4066868"/>
             <a:ext cx="2076450" cy="247650"/>
           </a:xfrm>
           <a:prstGeom prst="rect">
@@ -9148,6 +9520,42 @@
           </a:p>
         </p:txBody>
       </p:sp>
+      <p:pic>
+        <p:nvPicPr>
+          <p:cNvPr id="13" name="Picture 12">
+            <a:extLst>
+              <a:ext uri="{FF2B5EF4-FFF2-40B4-BE49-F238E27FC236}">
+                <a16:creationId xmlns:a16="http://schemas.microsoft.com/office/drawing/2014/main" id="{01B06919-5820-9347-81ED-BF1C81A707CA}"/>
+              </a:ext>
+            </a:extLst>
+          </p:cNvPr>
+          <p:cNvPicPr>
+            <a:picLocks noChangeAspect="1"/>
+          </p:cNvPicPr>
+          <p:nvPr/>
+        </p:nvPicPr>
+        <p:blipFill>
+          <a:blip r:embed="rId9">
+            <a:extLst>
+              <a:ext uri="{28A0092B-C50C-407E-A947-70E740481C1C}">
+                <a14:useLocalDpi xmlns:a14="http://schemas.microsoft.com/office/drawing/2010/main" val="0"/>
+              </a:ext>
+            </a:extLst>
+          </a:blip>
+          <a:stretch>
+            <a:fillRect/>
+          </a:stretch>
+        </p:blipFill>
+        <p:spPr>
+          <a:xfrm>
+            <a:off x="10820400" y="326316"/>
+            <a:ext cx="1156607" cy="397584"/>
+          </a:xfrm>
+          <a:prstGeom prst="rect">
+            <a:avLst/>
+          </a:prstGeom>
+        </p:spPr>
+      </p:pic>
     </p:spTree>
     <p:extLst>
       <p:ext uri="{BB962C8B-B14F-4D97-AF65-F5344CB8AC3E}">
@@ -9623,7 +10031,7 @@
         </p:nvSpPr>
         <p:spPr>
           <a:xfrm>
-            <a:off x="1695450" y="2647950"/>
+            <a:off x="1695450" y="2628900"/>
             <a:ext cx="2838450" cy="247650"/>
           </a:xfrm>
           <a:prstGeom prst="rect">
@@ -9647,7 +10055,7 @@
               </a:defRPr>
             </a:pPr>
             <a:r>
-              <a:rPr sz="1275" b="1">
+              <a:rPr sz="1275" b="1" dirty="0">
                 <a:solidFill>
                   <a:srgbClr val="083344"/>
                 </a:solidFill>
@@ -9743,7 +10151,7 @@
         </p:nvSpPr>
         <p:spPr>
           <a:xfrm>
-            <a:off x="1695450" y="3200400"/>
+            <a:off x="1695450" y="3181350"/>
             <a:ext cx="2838450" cy="247650"/>
           </a:xfrm>
           <a:prstGeom prst="rect">
@@ -9767,7 +10175,7 @@
               </a:defRPr>
             </a:pPr>
             <a:r>
-              <a:rPr sz="1275" b="1">
+              <a:rPr sz="1275" b="1" dirty="0">
                 <a:solidFill>
                   <a:srgbClr val="083344"/>
                 </a:solidFill>
@@ -9863,7 +10271,7 @@
         </p:nvSpPr>
         <p:spPr>
           <a:xfrm>
-            <a:off x="1695450" y="3752850"/>
+            <a:off x="1695450" y="3733800"/>
             <a:ext cx="2838450" cy="247650"/>
           </a:xfrm>
           <a:prstGeom prst="rect">
@@ -9887,7 +10295,7 @@
               </a:defRPr>
             </a:pPr>
             <a:r>
-              <a:rPr sz="1275" b="1">
+              <a:rPr sz="1275" b="1" dirty="0">
                 <a:solidFill>
                   <a:srgbClr val="083344"/>
                 </a:solidFill>
@@ -9983,7 +10391,7 @@
         </p:nvSpPr>
         <p:spPr>
           <a:xfrm>
-            <a:off x="1695450" y="4305300"/>
+            <a:off x="1695450" y="4286250"/>
             <a:ext cx="2838450" cy="247650"/>
           </a:xfrm>
           <a:prstGeom prst="rect">
@@ -10007,7 +10415,7 @@
               </a:defRPr>
             </a:pPr>
             <a:r>
-              <a:rPr sz="1275" b="1">
+              <a:rPr sz="1275" b="1" dirty="0">
                 <a:solidFill>
                   <a:srgbClr val="083344"/>
                 </a:solidFill>
@@ -10103,7 +10511,7 @@
         </p:nvSpPr>
         <p:spPr>
           <a:xfrm>
-            <a:off x="7372350" y="2647950"/>
+            <a:off x="7372350" y="2628900"/>
             <a:ext cx="3048000" cy="247650"/>
           </a:xfrm>
           <a:prstGeom prst="rect">
@@ -10127,7 +10535,7 @@
               </a:defRPr>
             </a:pPr>
             <a:r>
-              <a:rPr sz="1275" b="1">
+              <a:rPr sz="1275" b="1" dirty="0">
                 <a:solidFill>
                   <a:srgbClr val="083344"/>
                 </a:solidFill>
@@ -10223,7 +10631,7 @@
         </p:nvSpPr>
         <p:spPr>
           <a:xfrm>
-            <a:off x="7372350" y="3200400"/>
+            <a:off x="7372350" y="3181350"/>
             <a:ext cx="3048000" cy="247650"/>
           </a:xfrm>
           <a:prstGeom prst="rect">
@@ -10247,7 +10655,7 @@
               </a:defRPr>
             </a:pPr>
             <a:r>
-              <a:rPr sz="1275" b="1">
+              <a:rPr sz="1275" b="1" dirty="0">
                 <a:solidFill>
                   <a:srgbClr val="083344"/>
                 </a:solidFill>
@@ -10343,7 +10751,7 @@
         </p:nvSpPr>
         <p:spPr>
           <a:xfrm>
-            <a:off x="7372350" y="3752850"/>
+            <a:off x="7372350" y="3733800"/>
             <a:ext cx="3048000" cy="247650"/>
           </a:xfrm>
           <a:prstGeom prst="rect">
@@ -10367,7 +10775,7 @@
               </a:defRPr>
             </a:pPr>
             <a:r>
-              <a:rPr sz="1275" b="1">
+              <a:rPr sz="1275" b="1" dirty="0">
                 <a:solidFill>
                   <a:srgbClr val="083344"/>
                 </a:solidFill>
@@ -10463,7 +10871,7 @@
         </p:nvSpPr>
         <p:spPr>
           <a:xfrm>
-            <a:off x="7372350" y="4305300"/>
+            <a:off x="7372350" y="4286250"/>
             <a:ext cx="3048000" cy="247650"/>
           </a:xfrm>
           <a:prstGeom prst="rect">
@@ -10487,7 +10895,7 @@
               </a:defRPr>
             </a:pPr>
             <a:r>
-              <a:rPr sz="1275" b="1">
+              <a:rPr sz="1275" b="1" dirty="0">
                 <a:solidFill>
                   <a:srgbClr val="083344"/>
                 </a:solidFill>
@@ -10597,6 +11005,42 @@
           </a:p>
         </p:txBody>
       </p:sp>
+      <p:pic>
+        <p:nvPicPr>
+          <p:cNvPr id="15" name="Picture 14">
+            <a:extLst>
+              <a:ext uri="{FF2B5EF4-FFF2-40B4-BE49-F238E27FC236}">
+                <a16:creationId xmlns:a16="http://schemas.microsoft.com/office/drawing/2014/main" id="{E511BC07-302E-2A6B-29EF-10DC95CDACE0}"/>
+              </a:ext>
+            </a:extLst>
+          </p:cNvPr>
+          <p:cNvPicPr>
+            <a:picLocks noChangeAspect="1"/>
+          </p:cNvPicPr>
+          <p:nvPr/>
+        </p:nvPicPr>
+        <p:blipFill>
+          <a:blip r:embed="rId11">
+            <a:extLst>
+              <a:ext uri="{28A0092B-C50C-407E-A947-70E740481C1C}">
+                <a14:useLocalDpi xmlns:a14="http://schemas.microsoft.com/office/drawing/2010/main" val="0"/>
+              </a:ext>
+            </a:extLst>
+          </a:blip>
+          <a:stretch>
+            <a:fillRect/>
+          </a:stretch>
+        </p:blipFill>
+        <p:spPr>
+          <a:xfrm>
+            <a:off x="10820400" y="326316"/>
+            <a:ext cx="1156607" cy="397584"/>
+          </a:xfrm>
+          <a:prstGeom prst="rect">
+            <a:avLst/>
+          </a:prstGeom>
+        </p:spPr>
+      </p:pic>
     </p:spTree>
     <p:extLst>
       <p:ext uri="{BB962C8B-B14F-4D97-AF65-F5344CB8AC3E}">
@@ -11844,6 +12288,42 @@
           </a:p>
         </p:txBody>
       </p:sp>
+      <p:pic>
+        <p:nvPicPr>
+          <p:cNvPr id="13" name="Picture 12">
+            <a:extLst>
+              <a:ext uri="{FF2B5EF4-FFF2-40B4-BE49-F238E27FC236}">
+                <a16:creationId xmlns:a16="http://schemas.microsoft.com/office/drawing/2014/main" id="{38E7800E-04CF-5890-FD16-40E11B2EA8F3}"/>
+              </a:ext>
+            </a:extLst>
+          </p:cNvPr>
+          <p:cNvPicPr>
+            <a:picLocks noChangeAspect="1"/>
+          </p:cNvPicPr>
+          <p:nvPr/>
+        </p:nvPicPr>
+        <p:blipFill>
+          <a:blip r:embed="rId8">
+            <a:extLst>
+              <a:ext uri="{28A0092B-C50C-407E-A947-70E740481C1C}">
+                <a14:useLocalDpi xmlns:a14="http://schemas.microsoft.com/office/drawing/2010/main" val="0"/>
+              </a:ext>
+            </a:extLst>
+          </a:blip>
+          <a:stretch>
+            <a:fillRect/>
+          </a:stretch>
+        </p:blipFill>
+        <p:spPr>
+          <a:xfrm>
+            <a:off x="10820400" y="326316"/>
+            <a:ext cx="1156607" cy="397584"/>
+          </a:xfrm>
+          <a:prstGeom prst="rect">
+            <a:avLst/>
+          </a:prstGeom>
+        </p:spPr>
+      </p:pic>
     </p:spTree>
     <p:extLst>
       <p:ext uri="{BB962C8B-B14F-4D97-AF65-F5344CB8AC3E}">
@@ -12398,6 +12878,19 @@
               </a:rPr>
               <a:t>PHP</a:t>
             </a:r>
+            <a:r>
+              <a:rPr lang="de-DE" sz="1275" b="1" dirty="0">
+                <a:solidFill>
+                  <a:srgbClr val="083344"/>
+                </a:solidFill>
+              </a:rPr>
+              <a:t> 8.3</a:t>
+            </a:r>
+            <a:endParaRPr sz="1275" b="1" dirty="0">
+              <a:solidFill>
+                <a:srgbClr val="083344"/>
+              </a:solidFill>
+            </a:endParaRPr>
           </a:p>
         </p:txBody>
       </p:sp>
@@ -12516,8 +13009,21 @@
                   <a:srgbClr val="083344"/>
                 </a:solidFill>
               </a:rPr>
-              <a:t>Laravel MVC</a:t>
-            </a:r>
+              <a:t>Laravel </a:t>
+            </a:r>
+            <a:r>
+              <a:rPr lang="de-DE" sz="1275" b="1" dirty="0">
+                <a:solidFill>
+                  <a:srgbClr val="083344"/>
+                </a:solidFill>
+              </a:rPr>
+              <a:t>12</a:t>
+            </a:r>
+            <a:endParaRPr sz="1275" b="1" dirty="0">
+              <a:solidFill>
+                <a:srgbClr val="083344"/>
+              </a:solidFill>
+            </a:endParaRPr>
           </a:p>
         </p:txBody>
       </p:sp>
@@ -12981,6 +13487,42 @@
           </a:p>
         </p:txBody>
       </p:sp>
+      <p:pic>
+        <p:nvPicPr>
+          <p:cNvPr id="11" name="Picture 10">
+            <a:extLst>
+              <a:ext uri="{FF2B5EF4-FFF2-40B4-BE49-F238E27FC236}">
+                <a16:creationId xmlns:a16="http://schemas.microsoft.com/office/drawing/2014/main" id="{62AC922F-F0C2-7CA2-3A6C-23933B96EB9B}"/>
+              </a:ext>
+            </a:extLst>
+          </p:cNvPr>
+          <p:cNvPicPr>
+            <a:picLocks noChangeAspect="1"/>
+          </p:cNvPicPr>
+          <p:nvPr/>
+        </p:nvPicPr>
+        <p:blipFill>
+          <a:blip r:embed="rId10">
+            <a:extLst>
+              <a:ext uri="{28A0092B-C50C-407E-A947-70E740481C1C}">
+                <a14:useLocalDpi xmlns:a14="http://schemas.microsoft.com/office/drawing/2010/main" val="0"/>
+              </a:ext>
+            </a:extLst>
+          </a:blip>
+          <a:stretch>
+            <a:fillRect/>
+          </a:stretch>
+        </p:blipFill>
+        <p:spPr>
+          <a:xfrm>
+            <a:off x="10820400" y="326316"/>
+            <a:ext cx="1156607" cy="397584"/>
+          </a:xfrm>
+          <a:prstGeom prst="rect">
+            <a:avLst/>
+          </a:prstGeom>
+        </p:spPr>
+      </p:pic>
     </p:spTree>
     <p:extLst>
       <p:ext uri="{BB962C8B-B14F-4D97-AF65-F5344CB8AC3E}">
@@ -13152,13 +13694,26 @@
               </a:defRPr>
             </a:pPr>
             <a:r>
-              <a:rPr sz="2850" b="1">
+              <a:rPr sz="2850" b="1" dirty="0">
                 <a:solidFill>
                   <a:srgbClr val="083344"/>
                 </a:solidFill>
               </a:rPr>
-              <a:t>MVC and Hexagonal Decisions</a:t>
-            </a:r>
+              <a:t>MVC and Hexagonal </a:t>
+            </a:r>
+            <a:r>
+              <a:rPr lang="de-DE" sz="2850" b="1" dirty="0">
+                <a:solidFill>
+                  <a:srgbClr val="083344"/>
+                </a:solidFill>
+              </a:rPr>
+              <a:t>Architecture</a:t>
+            </a:r>
+            <a:endParaRPr sz="2850" b="1" dirty="0">
+              <a:solidFill>
+                <a:srgbClr val="083344"/>
+              </a:solidFill>
+            </a:endParaRPr>
           </a:p>
         </p:txBody>
       </p:sp>
@@ -14328,6 +14883,42 @@
           </a:p>
         </p:txBody>
       </p:sp>
+      <p:pic>
+        <p:nvPicPr>
+          <p:cNvPr id="16" name="Picture 15">
+            <a:extLst>
+              <a:ext uri="{FF2B5EF4-FFF2-40B4-BE49-F238E27FC236}">
+                <a16:creationId xmlns:a16="http://schemas.microsoft.com/office/drawing/2014/main" id="{9855D3D0-2824-1F73-0CE7-A977BA5106C0}"/>
+              </a:ext>
+            </a:extLst>
+          </p:cNvPr>
+          <p:cNvPicPr>
+            <a:picLocks noChangeAspect="1"/>
+          </p:cNvPicPr>
+          <p:nvPr/>
+        </p:nvPicPr>
+        <p:blipFill>
+          <a:blip r:embed="rId8">
+            <a:extLst>
+              <a:ext uri="{28A0092B-C50C-407E-A947-70E740481C1C}">
+                <a14:useLocalDpi xmlns:a14="http://schemas.microsoft.com/office/drawing/2010/main" val="0"/>
+              </a:ext>
+            </a:extLst>
+          </a:blip>
+          <a:stretch>
+            <a:fillRect/>
+          </a:stretch>
+        </p:blipFill>
+        <p:spPr>
+          <a:xfrm>
+            <a:off x="10820400" y="326316"/>
+            <a:ext cx="1156607" cy="397584"/>
+          </a:xfrm>
+          <a:prstGeom prst="rect">
+            <a:avLst/>
+          </a:prstGeom>
+        </p:spPr>
+      </p:pic>
     </p:spTree>
     <p:extLst>
       <p:ext uri="{BB962C8B-B14F-4D97-AF65-F5344CB8AC3E}">

--- a/Software Specification & Design.pptx
+++ b/Software Specification & Design.pptx
@@ -1999,7 +1999,7 @@
         </p:nvSpPr>
         <p:spPr>
           <a:xfrm>
-            <a:off x="685800" y="6419850"/>
+            <a:off x="914400" y="6430274"/>
             <a:ext cx="5905500" cy="228600"/>
           </a:xfrm>
           <a:prstGeom prst="rect">
@@ -2015,7 +2015,7 @@
           <a:bodyPr/>
           <a:lstStyle/>
           <a:p>
-            <a:pPr algn="l">
+            <a:pPr>
               <a:defRPr sz="900" b="0">
                 <a:solidFill>
                   <a:srgbClr val="5B6B78"/>
@@ -2030,6 +2030,51 @@
               </a:rPr>
               <a:t>AI-powered enterprise document retrieval system</a:t>
             </a:r>
+            <a:r>
+              <a:rPr lang="de-DE" sz="900" b="0" dirty="0">
+                <a:solidFill>
+                  <a:srgbClr val="5B6B78"/>
+                </a:solidFill>
+              </a:rPr>
+              <a:t> </a:t>
+            </a:r>
+            <a:r>
+              <a:rPr lang="en-US" sz="900" b="0" dirty="0">
+                <a:solidFill>
+                  <a:srgbClr val="5B6B78"/>
+                </a:solidFill>
+              </a:rPr>
+              <a:t>|</a:t>
+            </a:r>
+            <a:r>
+              <a:rPr lang="de-DE" sz="900" b="0" dirty="0">
+                <a:solidFill>
+                  <a:srgbClr val="5B6B78"/>
+                </a:solidFill>
+              </a:rPr>
+              <a:t> Md Fahim Hossain </a:t>
+            </a:r>
+            <a:r>
+              <a:rPr lang="en-US" sz="900" dirty="0">
+                <a:solidFill>
+                  <a:srgbClr val="5B6B78"/>
+                </a:solidFill>
+              </a:rPr>
+              <a:t>| July 2026</a:t>
+            </a:r>
+            <a:r>
+              <a:rPr lang="de-DE" sz="900" b="0" dirty="0">
+                <a:solidFill>
+                  <a:srgbClr val="5B6B78"/>
+                </a:solidFill>
+              </a:rPr>
+              <a:t> </a:t>
+            </a:r>
+            <a:endParaRPr sz="900" b="0" dirty="0">
+              <a:solidFill>
+                <a:srgbClr val="5B6B78"/>
+              </a:solidFill>
+            </a:endParaRPr>
           </a:p>
         </p:txBody>
       </p:sp>
@@ -2342,7 +2387,7 @@
               </a:defRPr>
             </a:pPr>
             <a:r>
-              <a:rPr sz="900" b="1">
+              <a:rPr sz="900" b="1" dirty="0">
                 <a:solidFill>
                   <a:srgbClr val="009999"/>
                 </a:solidFill>
@@ -3101,7 +3146,7 @@
           <a:bodyPr/>
           <a:lstStyle/>
           <a:p>
-            <a:pPr algn="l">
+            <a:pPr>
               <a:defRPr sz="900" b="0">
                 <a:solidFill>
                   <a:srgbClr val="5B6B78"/>
@@ -3109,13 +3154,58 @@
               </a:defRPr>
             </a:pPr>
             <a:r>
-              <a:rPr sz="900" b="0">
+              <a:rPr sz="900" b="0" dirty="0">
                 <a:solidFill>
                   <a:srgbClr val="5B6B78"/>
                 </a:solidFill>
               </a:rPr>
               <a:t>AI-powered enterprise document retrieval system</a:t>
             </a:r>
+            <a:r>
+              <a:rPr lang="de-DE" sz="900" b="0" dirty="0">
+                <a:solidFill>
+                  <a:srgbClr val="5B6B78"/>
+                </a:solidFill>
+              </a:rPr>
+              <a:t> </a:t>
+            </a:r>
+            <a:r>
+              <a:rPr lang="en-US" sz="900" dirty="0">
+                <a:solidFill>
+                  <a:srgbClr val="5B6B78"/>
+                </a:solidFill>
+              </a:rPr>
+              <a:t>|</a:t>
+            </a:r>
+            <a:r>
+              <a:rPr lang="de-DE" sz="900" dirty="0">
+                <a:solidFill>
+                  <a:srgbClr val="5B6B78"/>
+                </a:solidFill>
+              </a:rPr>
+              <a:t> Md Fahim Hossain </a:t>
+            </a:r>
+            <a:r>
+              <a:rPr lang="en-US" sz="900" dirty="0">
+                <a:solidFill>
+                  <a:srgbClr val="5B6B78"/>
+                </a:solidFill>
+              </a:rPr>
+              <a:t>| July 2026</a:t>
+            </a:r>
+            <a:r>
+              <a:rPr lang="de-DE" sz="900" dirty="0">
+                <a:solidFill>
+                  <a:srgbClr val="5B6B78"/>
+                </a:solidFill>
+              </a:rPr>
+              <a:t> </a:t>
+            </a:r>
+            <a:endParaRPr sz="900" b="0" dirty="0">
+              <a:solidFill>
+                <a:srgbClr val="5B6B78"/>
+              </a:solidFill>
+            </a:endParaRPr>
           </a:p>
         </p:txBody>
       </p:sp>
@@ -3496,7 +3586,7 @@
           <a:bodyPr/>
           <a:lstStyle/>
           <a:p>
-            <a:pPr algn="l">
+            <a:pPr>
               <a:defRPr sz="900" b="0">
                 <a:solidFill>
                   <a:srgbClr val="5B6B78"/>
@@ -3504,13 +3594,58 @@
               </a:defRPr>
             </a:pPr>
             <a:r>
-              <a:rPr sz="900" b="0">
+              <a:rPr sz="900" b="0" dirty="0">
                 <a:solidFill>
                   <a:srgbClr val="5B6B78"/>
                 </a:solidFill>
               </a:rPr>
               <a:t>AI-powered enterprise document retrieval system</a:t>
             </a:r>
+            <a:r>
+              <a:rPr lang="de-DE" sz="900" b="0" dirty="0">
+                <a:solidFill>
+                  <a:srgbClr val="5B6B78"/>
+                </a:solidFill>
+              </a:rPr>
+              <a:t> </a:t>
+            </a:r>
+            <a:r>
+              <a:rPr lang="en-US" sz="900" dirty="0">
+                <a:solidFill>
+                  <a:srgbClr val="5B6B78"/>
+                </a:solidFill>
+              </a:rPr>
+              <a:t>|</a:t>
+            </a:r>
+            <a:r>
+              <a:rPr lang="de-DE" sz="900" dirty="0">
+                <a:solidFill>
+                  <a:srgbClr val="5B6B78"/>
+                </a:solidFill>
+              </a:rPr>
+              <a:t> Md Fahim Hossain </a:t>
+            </a:r>
+            <a:r>
+              <a:rPr lang="en-US" sz="900" dirty="0">
+                <a:solidFill>
+                  <a:srgbClr val="5B6B78"/>
+                </a:solidFill>
+              </a:rPr>
+              <a:t>| July 2026</a:t>
+            </a:r>
+            <a:r>
+              <a:rPr lang="de-DE" sz="900" dirty="0">
+                <a:solidFill>
+                  <a:srgbClr val="5B6B78"/>
+                </a:solidFill>
+              </a:rPr>
+              <a:t> </a:t>
+            </a:r>
+            <a:endParaRPr sz="900" b="0" dirty="0">
+              <a:solidFill>
+                <a:srgbClr val="5B6B78"/>
+              </a:solidFill>
+            </a:endParaRPr>
           </a:p>
         </p:txBody>
       </p:sp>
@@ -4757,7 +4892,7 @@
           <a:bodyPr/>
           <a:lstStyle/>
           <a:p>
-            <a:pPr algn="l">
+            <a:pPr>
               <a:defRPr sz="900" b="0">
                 <a:solidFill>
                   <a:srgbClr val="5B6B78"/>
@@ -4765,13 +4900,58 @@
               </a:defRPr>
             </a:pPr>
             <a:r>
-              <a:rPr sz="900" b="0">
+              <a:rPr sz="900" b="0" dirty="0">
                 <a:solidFill>
                   <a:srgbClr val="5B6B78"/>
                 </a:solidFill>
               </a:rPr>
               <a:t>AI-powered enterprise document retrieval system</a:t>
             </a:r>
+            <a:r>
+              <a:rPr lang="de-DE" sz="900" b="0" dirty="0">
+                <a:solidFill>
+                  <a:srgbClr val="5B6B78"/>
+                </a:solidFill>
+              </a:rPr>
+              <a:t> </a:t>
+            </a:r>
+            <a:r>
+              <a:rPr lang="en-US" sz="900" dirty="0">
+                <a:solidFill>
+                  <a:srgbClr val="5B6B78"/>
+                </a:solidFill>
+              </a:rPr>
+              <a:t>|</a:t>
+            </a:r>
+            <a:r>
+              <a:rPr lang="de-DE" sz="900" dirty="0">
+                <a:solidFill>
+                  <a:srgbClr val="5B6B78"/>
+                </a:solidFill>
+              </a:rPr>
+              <a:t> Md Fahim Hossain </a:t>
+            </a:r>
+            <a:r>
+              <a:rPr lang="en-US" sz="900" dirty="0">
+                <a:solidFill>
+                  <a:srgbClr val="5B6B78"/>
+                </a:solidFill>
+              </a:rPr>
+              <a:t>| July 2026</a:t>
+            </a:r>
+            <a:r>
+              <a:rPr lang="de-DE" sz="900" dirty="0">
+                <a:solidFill>
+                  <a:srgbClr val="5B6B78"/>
+                </a:solidFill>
+              </a:rPr>
+              <a:t> </a:t>
+            </a:r>
+            <a:endParaRPr sz="900" b="0" dirty="0">
+              <a:solidFill>
+                <a:srgbClr val="5B6B78"/>
+              </a:solidFill>
+            </a:endParaRPr>
           </a:p>
         </p:txBody>
       </p:sp>
@@ -4982,13 +5162,18 @@
               </a:defRPr>
             </a:pPr>
             <a:r>
-              <a:rPr sz="900" b="1">
+              <a:rPr lang="de-DE" sz="900" b="1" dirty="0">
                 <a:solidFill>
                   <a:srgbClr val="009999"/>
                 </a:solidFill>
               </a:rPr>
-              <a:t>MAIN SLIDE 1</a:t>
-            </a:r>
+              <a:t>INTRODUCTION</a:t>
+            </a:r>
+            <a:endParaRPr sz="900" b="1" dirty="0">
+              <a:solidFill>
+                <a:srgbClr val="009999"/>
+              </a:solidFill>
+            </a:endParaRPr>
           </a:p>
         </p:txBody>
       </p:sp>
@@ -6350,7 +6535,7 @@
           <a:bodyPr/>
           <a:lstStyle/>
           <a:p>
-            <a:pPr algn="l">
+            <a:pPr>
               <a:defRPr sz="900" b="0">
                 <a:solidFill>
                   <a:srgbClr val="5B6B78"/>
@@ -6358,13 +6543,58 @@
               </a:defRPr>
             </a:pPr>
             <a:r>
-              <a:rPr sz="900" b="0">
+              <a:rPr sz="900" b="0" dirty="0">
                 <a:solidFill>
                   <a:srgbClr val="5B6B78"/>
                 </a:solidFill>
               </a:rPr>
               <a:t>AI-powered enterprise document retrieval system</a:t>
             </a:r>
+            <a:r>
+              <a:rPr lang="de-DE" sz="900" b="0" dirty="0">
+                <a:solidFill>
+                  <a:srgbClr val="5B6B78"/>
+                </a:solidFill>
+              </a:rPr>
+              <a:t> </a:t>
+            </a:r>
+            <a:r>
+              <a:rPr lang="en-US" sz="900" dirty="0">
+                <a:solidFill>
+                  <a:srgbClr val="5B6B78"/>
+                </a:solidFill>
+              </a:rPr>
+              <a:t>|</a:t>
+            </a:r>
+            <a:r>
+              <a:rPr lang="de-DE" sz="900" dirty="0">
+                <a:solidFill>
+                  <a:srgbClr val="5B6B78"/>
+                </a:solidFill>
+              </a:rPr>
+              <a:t> Md Fahim Hossain </a:t>
+            </a:r>
+            <a:r>
+              <a:rPr lang="en-US" sz="900" dirty="0">
+                <a:solidFill>
+                  <a:srgbClr val="5B6B78"/>
+                </a:solidFill>
+              </a:rPr>
+              <a:t>| July 2026</a:t>
+            </a:r>
+            <a:r>
+              <a:rPr lang="de-DE" sz="900" dirty="0">
+                <a:solidFill>
+                  <a:srgbClr val="5B6B78"/>
+                </a:solidFill>
+              </a:rPr>
+              <a:t> </a:t>
+            </a:r>
+            <a:endParaRPr sz="900" b="0" dirty="0">
+              <a:solidFill>
+                <a:srgbClr val="5B6B78"/>
+              </a:solidFill>
+            </a:endParaRPr>
           </a:p>
         </p:txBody>
       </p:sp>
@@ -6567,7 +6797,7 @@
           <a:bodyPr/>
           <a:lstStyle/>
           <a:p>
-            <a:pPr algn="l">
+            <a:pPr>
               <a:defRPr sz="900" b="1">
                 <a:solidFill>
                   <a:srgbClr val="009999"/>
@@ -6575,13 +6805,18 @@
               </a:defRPr>
             </a:pPr>
             <a:r>
-              <a:rPr sz="900" b="1">
+              <a:rPr lang="de-DE" sz="900" b="1" dirty="0">
                 <a:solidFill>
                   <a:srgbClr val="009999"/>
                 </a:solidFill>
               </a:rPr>
-              <a:t>MAIN SLIDE 2</a:t>
-            </a:r>
+              <a:t>INTRODUCTION</a:t>
+            </a:r>
+            <a:endParaRPr sz="900" b="1" dirty="0">
+              <a:solidFill>
+                <a:srgbClr val="009999"/>
+              </a:solidFill>
+            </a:endParaRPr>
           </a:p>
         </p:txBody>
       </p:sp>
@@ -7975,7 +8210,7 @@
           <a:bodyPr/>
           <a:lstStyle/>
           <a:p>
-            <a:pPr algn="l">
+            <a:pPr>
               <a:defRPr sz="900" b="0">
                 <a:solidFill>
                   <a:srgbClr val="5B6B78"/>
@@ -7983,13 +8218,58 @@
               </a:defRPr>
             </a:pPr>
             <a:r>
-              <a:rPr sz="900" b="0">
+              <a:rPr sz="900" b="0" dirty="0">
                 <a:solidFill>
                   <a:srgbClr val="5B6B78"/>
                 </a:solidFill>
               </a:rPr>
               <a:t>AI-powered enterprise document retrieval system</a:t>
             </a:r>
+            <a:r>
+              <a:rPr lang="de-DE" sz="900" b="0" dirty="0">
+                <a:solidFill>
+                  <a:srgbClr val="5B6B78"/>
+                </a:solidFill>
+              </a:rPr>
+              <a:t> </a:t>
+            </a:r>
+            <a:r>
+              <a:rPr lang="en-US" sz="900" dirty="0">
+                <a:solidFill>
+                  <a:srgbClr val="5B6B78"/>
+                </a:solidFill>
+              </a:rPr>
+              <a:t>|</a:t>
+            </a:r>
+            <a:r>
+              <a:rPr lang="de-DE" sz="900" dirty="0">
+                <a:solidFill>
+                  <a:srgbClr val="5B6B78"/>
+                </a:solidFill>
+              </a:rPr>
+              <a:t> Md Fahim Hossain </a:t>
+            </a:r>
+            <a:r>
+              <a:rPr lang="en-US" sz="900" dirty="0">
+                <a:solidFill>
+                  <a:srgbClr val="5B6B78"/>
+                </a:solidFill>
+              </a:rPr>
+              <a:t>| July 2026</a:t>
+            </a:r>
+            <a:r>
+              <a:rPr lang="de-DE" sz="900" dirty="0">
+                <a:solidFill>
+                  <a:srgbClr val="5B6B78"/>
+                </a:solidFill>
+              </a:rPr>
+              <a:t> </a:t>
+            </a:r>
+            <a:endParaRPr sz="900" b="0" dirty="0">
+              <a:solidFill>
+                <a:srgbClr val="5B6B78"/>
+              </a:solidFill>
+            </a:endParaRPr>
           </a:p>
         </p:txBody>
       </p:sp>
@@ -8192,7 +8472,7 @@
           <a:bodyPr/>
           <a:lstStyle/>
           <a:p>
-            <a:pPr algn="l">
+            <a:pPr>
               <a:defRPr sz="900" b="1">
                 <a:solidFill>
                   <a:srgbClr val="009999"/>
@@ -8200,13 +8480,18 @@
               </a:defRPr>
             </a:pPr>
             <a:r>
-              <a:rPr sz="900" b="1">
+              <a:rPr lang="en-US" sz="900" b="1" dirty="0">
                 <a:solidFill>
                   <a:srgbClr val="009999"/>
                 </a:solidFill>
               </a:rPr>
-              <a:t>MAIN SLIDE 3</a:t>
-            </a:r>
+              <a:t>SPECIFICATION</a:t>
+            </a:r>
+            <a:endParaRPr sz="900" b="1" dirty="0">
+              <a:solidFill>
+                <a:srgbClr val="009999"/>
+              </a:solidFill>
+            </a:endParaRPr>
           </a:p>
         </p:txBody>
       </p:sp>
@@ -8250,7 +8535,7 @@
               </a:defRPr>
             </a:pPr>
             <a:r>
-              <a:rPr sz="2850" b="1">
+              <a:rPr sz="2850" b="1" dirty="0">
                 <a:solidFill>
                   <a:srgbClr val="083344"/>
                 </a:solidFill>
@@ -9452,7 +9737,7 @@
           <a:bodyPr/>
           <a:lstStyle/>
           <a:p>
-            <a:pPr algn="l">
+            <a:pPr>
               <a:defRPr sz="900" b="0">
                 <a:solidFill>
                   <a:srgbClr val="5B6B78"/>
@@ -9460,13 +9745,58 @@
               </a:defRPr>
             </a:pPr>
             <a:r>
-              <a:rPr sz="900" b="0">
+              <a:rPr sz="900" b="0" dirty="0">
                 <a:solidFill>
                   <a:srgbClr val="5B6B78"/>
                 </a:solidFill>
               </a:rPr>
               <a:t>AI-powered enterprise document retrieval system</a:t>
             </a:r>
+            <a:r>
+              <a:rPr lang="de-DE" sz="900" b="0" dirty="0">
+                <a:solidFill>
+                  <a:srgbClr val="5B6B78"/>
+                </a:solidFill>
+              </a:rPr>
+              <a:t> </a:t>
+            </a:r>
+            <a:r>
+              <a:rPr lang="en-US" sz="900" dirty="0">
+                <a:solidFill>
+                  <a:srgbClr val="5B6B78"/>
+                </a:solidFill>
+              </a:rPr>
+              <a:t>|</a:t>
+            </a:r>
+            <a:r>
+              <a:rPr lang="de-DE" sz="900" dirty="0">
+                <a:solidFill>
+                  <a:srgbClr val="5B6B78"/>
+                </a:solidFill>
+              </a:rPr>
+              <a:t> Md Fahim Hossain </a:t>
+            </a:r>
+            <a:r>
+              <a:rPr lang="en-US" sz="900" dirty="0">
+                <a:solidFill>
+                  <a:srgbClr val="5B6B78"/>
+                </a:solidFill>
+              </a:rPr>
+              <a:t>| July 2026</a:t>
+            </a:r>
+            <a:r>
+              <a:rPr lang="de-DE" sz="900" dirty="0">
+                <a:solidFill>
+                  <a:srgbClr val="5B6B78"/>
+                </a:solidFill>
+              </a:rPr>
+              <a:t> </a:t>
+            </a:r>
+            <a:endParaRPr sz="900" b="0" dirty="0">
+              <a:solidFill>
+                <a:srgbClr val="5B6B78"/>
+              </a:solidFill>
+            </a:endParaRPr>
           </a:p>
         </p:txBody>
       </p:sp>
@@ -9669,7 +9999,7 @@
           <a:bodyPr/>
           <a:lstStyle/>
           <a:p>
-            <a:pPr algn="l">
+            <a:pPr>
               <a:defRPr sz="900" b="1">
                 <a:solidFill>
                   <a:srgbClr val="009999"/>
@@ -9677,13 +10007,18 @@
               </a:defRPr>
             </a:pPr>
             <a:r>
-              <a:rPr sz="900" b="1">
+              <a:rPr lang="en-US" sz="900" b="1" dirty="0">
                 <a:solidFill>
                   <a:srgbClr val="009999"/>
                 </a:solidFill>
               </a:rPr>
-              <a:t>MAIN SLIDE 4</a:t>
-            </a:r>
+              <a:t>SPECIFICATION</a:t>
+            </a:r>
+            <a:endParaRPr sz="900" b="1" dirty="0">
+              <a:solidFill>
+                <a:srgbClr val="009999"/>
+              </a:solidFill>
+            </a:endParaRPr>
           </a:p>
         </p:txBody>
       </p:sp>
@@ -10937,7 +11272,7 @@
           <a:bodyPr/>
           <a:lstStyle/>
           <a:p>
-            <a:pPr algn="l">
+            <a:pPr>
               <a:defRPr sz="900" b="0">
                 <a:solidFill>
                   <a:srgbClr val="5B6B78"/>
@@ -10945,13 +11280,58 @@
               </a:defRPr>
             </a:pPr>
             <a:r>
-              <a:rPr sz="900" b="0">
+              <a:rPr sz="900" b="0" dirty="0">
                 <a:solidFill>
                   <a:srgbClr val="5B6B78"/>
                 </a:solidFill>
               </a:rPr>
               <a:t>AI-powered enterprise document retrieval system</a:t>
             </a:r>
+            <a:r>
+              <a:rPr lang="de-DE" sz="900" b="0" dirty="0">
+                <a:solidFill>
+                  <a:srgbClr val="5B6B78"/>
+                </a:solidFill>
+              </a:rPr>
+              <a:t> </a:t>
+            </a:r>
+            <a:r>
+              <a:rPr lang="en-US" sz="900" dirty="0">
+                <a:solidFill>
+                  <a:srgbClr val="5B6B78"/>
+                </a:solidFill>
+              </a:rPr>
+              <a:t>|</a:t>
+            </a:r>
+            <a:r>
+              <a:rPr lang="de-DE" sz="900" dirty="0">
+                <a:solidFill>
+                  <a:srgbClr val="5B6B78"/>
+                </a:solidFill>
+              </a:rPr>
+              <a:t> Md Fahim Hossain </a:t>
+            </a:r>
+            <a:r>
+              <a:rPr lang="en-US" sz="900" dirty="0">
+                <a:solidFill>
+                  <a:srgbClr val="5B6B78"/>
+                </a:solidFill>
+              </a:rPr>
+              <a:t>| July 2026</a:t>
+            </a:r>
+            <a:r>
+              <a:rPr lang="de-DE" sz="900" dirty="0">
+                <a:solidFill>
+                  <a:srgbClr val="5B6B78"/>
+                </a:solidFill>
+              </a:rPr>
+              <a:t> </a:t>
+            </a:r>
+            <a:endParaRPr sz="900" b="0" dirty="0">
+              <a:solidFill>
+                <a:srgbClr val="5B6B78"/>
+              </a:solidFill>
+            </a:endParaRPr>
           </a:p>
         </p:txBody>
       </p:sp>
@@ -11162,13 +11542,18 @@
               </a:defRPr>
             </a:pPr>
             <a:r>
-              <a:rPr sz="900" b="1">
+              <a:rPr lang="de-DE" sz="900" b="1" dirty="0">
                 <a:solidFill>
                   <a:srgbClr val="009999"/>
                 </a:solidFill>
               </a:rPr>
-              <a:t>MAIN SLIDE 5</a:t>
-            </a:r>
+              <a:t>DESIGN</a:t>
+            </a:r>
+            <a:endParaRPr sz="900" b="1" dirty="0">
+              <a:solidFill>
+                <a:srgbClr val="009999"/>
+              </a:solidFill>
+            </a:endParaRPr>
           </a:p>
         </p:txBody>
       </p:sp>
@@ -12220,7 +12605,7 @@
           <a:bodyPr/>
           <a:lstStyle/>
           <a:p>
-            <a:pPr algn="l">
+            <a:pPr>
               <a:defRPr sz="900" b="0">
                 <a:solidFill>
                   <a:srgbClr val="5B6B78"/>
@@ -12228,13 +12613,58 @@
               </a:defRPr>
             </a:pPr>
             <a:r>
-              <a:rPr sz="900" b="0">
+              <a:rPr sz="900" b="0" dirty="0">
                 <a:solidFill>
                   <a:srgbClr val="5B6B78"/>
                 </a:solidFill>
               </a:rPr>
               <a:t>AI-powered enterprise document retrieval system</a:t>
             </a:r>
+            <a:r>
+              <a:rPr lang="de-DE" sz="900" b="0" dirty="0">
+                <a:solidFill>
+                  <a:srgbClr val="5B6B78"/>
+                </a:solidFill>
+              </a:rPr>
+              <a:t> </a:t>
+            </a:r>
+            <a:r>
+              <a:rPr lang="en-US" sz="900" dirty="0">
+                <a:solidFill>
+                  <a:srgbClr val="5B6B78"/>
+                </a:solidFill>
+              </a:rPr>
+              <a:t>|</a:t>
+            </a:r>
+            <a:r>
+              <a:rPr lang="de-DE" sz="900" dirty="0">
+                <a:solidFill>
+                  <a:srgbClr val="5B6B78"/>
+                </a:solidFill>
+              </a:rPr>
+              <a:t> Md Fahim Hossain </a:t>
+            </a:r>
+            <a:r>
+              <a:rPr lang="en-US" sz="900" dirty="0">
+                <a:solidFill>
+                  <a:srgbClr val="5B6B78"/>
+                </a:solidFill>
+              </a:rPr>
+              <a:t>| July 2026</a:t>
+            </a:r>
+            <a:r>
+              <a:rPr lang="de-DE" sz="900" dirty="0">
+                <a:solidFill>
+                  <a:srgbClr val="5B6B78"/>
+                </a:solidFill>
+              </a:rPr>
+              <a:t> </a:t>
+            </a:r>
+            <a:endParaRPr sz="900" b="0" dirty="0">
+              <a:solidFill>
+                <a:srgbClr val="5B6B78"/>
+              </a:solidFill>
+            </a:endParaRPr>
           </a:p>
         </p:txBody>
       </p:sp>
@@ -12437,7 +12867,7 @@
           <a:bodyPr/>
           <a:lstStyle/>
           <a:p>
-            <a:pPr algn="l">
+            <a:pPr>
               <a:defRPr sz="900" b="1">
                 <a:solidFill>
                   <a:srgbClr val="009999"/>
@@ -12445,13 +12875,18 @@
               </a:defRPr>
             </a:pPr>
             <a:r>
-              <a:rPr sz="900" b="1">
+              <a:rPr lang="de-DE" sz="900" b="1" dirty="0">
                 <a:solidFill>
                   <a:srgbClr val="009999"/>
                 </a:solidFill>
               </a:rPr>
-              <a:t>MAIN SLIDE 6</a:t>
-            </a:r>
+              <a:t>DESIGN</a:t>
+            </a:r>
+            <a:endParaRPr sz="900" b="1" dirty="0">
+              <a:solidFill>
+                <a:srgbClr val="009999"/>
+              </a:solidFill>
+            </a:endParaRPr>
           </a:p>
         </p:txBody>
       </p:sp>
@@ -13419,7 +13854,7 @@
           <a:bodyPr/>
           <a:lstStyle/>
           <a:p>
-            <a:pPr algn="l">
+            <a:pPr>
               <a:defRPr sz="900" b="0">
                 <a:solidFill>
                   <a:srgbClr val="5B6B78"/>
@@ -13427,13 +13862,58 @@
               </a:defRPr>
             </a:pPr>
             <a:r>
-              <a:rPr sz="900" b="0">
+              <a:rPr sz="900" b="0" dirty="0">
                 <a:solidFill>
                   <a:srgbClr val="5B6B78"/>
                 </a:solidFill>
               </a:rPr>
               <a:t>AI-powered enterprise document retrieval system</a:t>
             </a:r>
+            <a:r>
+              <a:rPr lang="de-DE" sz="900" b="0" dirty="0">
+                <a:solidFill>
+                  <a:srgbClr val="5B6B78"/>
+                </a:solidFill>
+              </a:rPr>
+              <a:t> </a:t>
+            </a:r>
+            <a:r>
+              <a:rPr lang="en-US" sz="900" dirty="0">
+                <a:solidFill>
+                  <a:srgbClr val="5B6B78"/>
+                </a:solidFill>
+              </a:rPr>
+              <a:t>|</a:t>
+            </a:r>
+            <a:r>
+              <a:rPr lang="de-DE" sz="900" dirty="0">
+                <a:solidFill>
+                  <a:srgbClr val="5B6B78"/>
+                </a:solidFill>
+              </a:rPr>
+              <a:t> Md Fahim Hossain </a:t>
+            </a:r>
+            <a:r>
+              <a:rPr lang="en-US" sz="900" dirty="0">
+                <a:solidFill>
+                  <a:srgbClr val="5B6B78"/>
+                </a:solidFill>
+              </a:rPr>
+              <a:t>| July 2026</a:t>
+            </a:r>
+            <a:r>
+              <a:rPr lang="de-DE" sz="900" dirty="0">
+                <a:solidFill>
+                  <a:srgbClr val="5B6B78"/>
+                </a:solidFill>
+              </a:rPr>
+              <a:t> </a:t>
+            </a:r>
+            <a:endParaRPr sz="900" b="0" dirty="0">
+              <a:solidFill>
+                <a:srgbClr val="5B6B78"/>
+              </a:solidFill>
+            </a:endParaRPr>
           </a:p>
         </p:txBody>
       </p:sp>
@@ -13636,7 +14116,7 @@
           <a:bodyPr/>
           <a:lstStyle/>
           <a:p>
-            <a:pPr algn="l">
+            <a:pPr>
               <a:defRPr sz="900" b="1">
                 <a:solidFill>
                   <a:srgbClr val="009999"/>
@@ -13644,13 +14124,18 @@
               </a:defRPr>
             </a:pPr>
             <a:r>
-              <a:rPr sz="900" b="1">
+              <a:rPr lang="de-DE" sz="900" b="1" dirty="0">
                 <a:solidFill>
                   <a:srgbClr val="009999"/>
                 </a:solidFill>
               </a:rPr>
-              <a:t>MAIN SLIDE 7</a:t>
-            </a:r>
+              <a:t>DESIGN</a:t>
+            </a:r>
+            <a:endParaRPr sz="900" b="1" dirty="0">
+              <a:solidFill>
+                <a:srgbClr val="009999"/>
+              </a:solidFill>
+            </a:endParaRPr>
           </a:p>
         </p:txBody>
       </p:sp>
@@ -14815,7 +15300,7 @@
           <a:bodyPr/>
           <a:lstStyle/>
           <a:p>
-            <a:pPr algn="l">
+            <a:pPr>
               <a:defRPr sz="900" b="0">
                 <a:solidFill>
                   <a:srgbClr val="5B6B78"/>
@@ -14823,13 +15308,58 @@
               </a:defRPr>
             </a:pPr>
             <a:r>
-              <a:rPr sz="900" b="0">
+              <a:rPr sz="900" b="0" dirty="0">
                 <a:solidFill>
                   <a:srgbClr val="5B6B78"/>
                 </a:solidFill>
               </a:rPr>
               <a:t>AI-powered enterprise document retrieval system</a:t>
             </a:r>
+            <a:r>
+              <a:rPr lang="de-DE" sz="900" b="0" dirty="0">
+                <a:solidFill>
+                  <a:srgbClr val="5B6B78"/>
+                </a:solidFill>
+              </a:rPr>
+              <a:t> </a:t>
+            </a:r>
+            <a:r>
+              <a:rPr lang="en-US" sz="900" dirty="0">
+                <a:solidFill>
+                  <a:srgbClr val="5B6B78"/>
+                </a:solidFill>
+              </a:rPr>
+              <a:t>|</a:t>
+            </a:r>
+            <a:r>
+              <a:rPr lang="de-DE" sz="900" dirty="0">
+                <a:solidFill>
+                  <a:srgbClr val="5B6B78"/>
+                </a:solidFill>
+              </a:rPr>
+              <a:t> Md Fahim Hossain </a:t>
+            </a:r>
+            <a:r>
+              <a:rPr lang="en-US" sz="900" dirty="0">
+                <a:solidFill>
+                  <a:srgbClr val="5B6B78"/>
+                </a:solidFill>
+              </a:rPr>
+              <a:t>| July 2026</a:t>
+            </a:r>
+            <a:r>
+              <a:rPr lang="de-DE" sz="900" dirty="0">
+                <a:solidFill>
+                  <a:srgbClr val="5B6B78"/>
+                </a:solidFill>
+              </a:rPr>
+              <a:t> </a:t>
+            </a:r>
+            <a:endParaRPr sz="900" b="0" dirty="0">
+              <a:solidFill>
+                <a:srgbClr val="5B6B78"/>
+              </a:solidFill>
+            </a:endParaRPr>
           </a:p>
         </p:txBody>
       </p:sp>

--- a/Software Specification & Design.pptx
+++ b/Software Specification & Design.pptx
@@ -13003,13 +13003,22 @@
           <p:nvPr/>
         </p:nvPicPr>
         <p:blipFill>
-          <a:blip r:embed="rId3"/>
-          <a:stretch/>
+          <a:blip r:embed="rId3">
+            <a:extLst>
+              <a:ext uri="{28A0092B-C50C-407E-A947-70E740481C1C}">
+                <a14:useLocalDpi xmlns:a14="http://schemas.microsoft.com/office/drawing/2010/main" val="0"/>
+              </a:ext>
+            </a:extLst>
+          </a:blip>
+          <a:srcRect l="1183" r="1183" b="9023"/>
+          <a:stretch>
+            <a:fillRect/>
+          </a:stretch>
         </p:blipFill>
         <p:spPr>
           <a:xfrm>
-            <a:off x="1071900" y="1524000"/>
-            <a:ext cx="4142701" cy="2800350"/>
+            <a:off x="1039500" y="1524000"/>
+            <a:ext cx="4207500" cy="2800350"/>
           </a:xfrm>
           <a:prstGeom prst="roundRect">
             <a:avLst>

--- a/Software Specification & Design.pptx
+++ b/Software Specification & Design.pptx
@@ -960,8 +960,18 @@
           <a:lstStyle/>
           <a:p>
             <a:r>
-              <a:t>This slide shows the high-level architecture extracted directly from the report. The system uses a Laravel web application as the central coordination layer. Users interact through the web interface, documents enter a processing pipeline with text extraction and OCR, chunks are stored with vector representations, and semantic search retrieves relevant context. The response generation step is document-grounded, meaning the answer is based on selected retrieved content rather than unsupported general output.</a:t>
-            </a:r>
+              <a:rPr lang="en-US" dirty="0"/>
+              <a:t>This slide presents the system’s high-level architecture. Users access the Laravel application through the web interface, with authentication and RBAC protecting documents and conversations. Uploaded documents are processed using Poppler and Tesseract OCR, divided into chunks, converted into embeddings, and stored in PostgreSQL with </a:t>
+            </a:r>
+            <a:r>
+              <a:rPr lang="en-US" dirty="0" err="1"/>
+              <a:t>pgvector</a:t>
+            </a:r>
+            <a:r>
+              <a:rPr lang="en-US" dirty="0"/>
+              <a:t>. When a question is submitted, the Chat Module retrieves the most relevant content from the selected documents and provides it to the language model. The grounded response is returned with source references and saved in the conversation history, ensuring answers remain based on trusted document content.</a:t>
+            </a:r>
+            <a:endParaRPr dirty="0"/>
           </a:p>
         </p:txBody>
       </p:sp>
@@ -1037,6 +1047,7 @@
           <a:lstStyle/>
           <a:p>
             <a:r>
+              <a:rPr dirty="0"/>
               <a:t>The structure slide connects three views of the same system. The use case diagram summarizes the actors and interactions, such as uploading documents, monitoring processing, asking questions, and viewing references. The ER diagram shows how users, documents, chunks, conversations, messages, and usage logs are stored. The implementation stack is Laravel with PHP, PostgreSQL with vector storage, JavaScript for interface behavior, and an OCR-enabled document processing pipeline.</a:t>
             </a:r>
           </a:p>
@@ -2463,7 +2474,7 @@
         </p:nvSpPr>
         <p:spPr>
           <a:xfrm>
-            <a:off x="1447800" y="1638300"/>
+            <a:off x="1726096" y="1700974"/>
             <a:ext cx="3810000" cy="552450"/>
           </a:xfrm>
           <a:prstGeom prst="roundRect">
@@ -2509,7 +2520,7 @@
         </p:blipFill>
         <p:spPr>
           <a:xfrm>
-            <a:off x="1600200" y="1789176"/>
+            <a:off x="1888435" y="1861789"/>
             <a:ext cx="228600" cy="228600"/>
           </a:xfrm>
           <a:prstGeom prst="rect">
@@ -2533,7 +2544,7 @@
         </p:nvSpPr>
         <p:spPr>
           <a:xfrm>
-            <a:off x="1924050" y="1752600"/>
+            <a:off x="2202346" y="1815274"/>
             <a:ext cx="3219450" cy="247650"/>
           </a:xfrm>
           <a:prstGeom prst="rect">
@@ -2557,7 +2568,7 @@
               </a:defRPr>
             </a:pPr>
             <a:r>
-              <a:rPr sz="1275" b="1">
+              <a:rPr sz="1400" b="1" dirty="0">
                 <a:solidFill>
                   <a:srgbClr val="083344"/>
                 </a:solidFill>
@@ -2583,7 +2594,7 @@
         </p:nvSpPr>
         <p:spPr>
           <a:xfrm>
-            <a:off x="5924550" y="1638300"/>
+            <a:off x="6202846" y="1700974"/>
             <a:ext cx="3810000" cy="552450"/>
           </a:xfrm>
           <a:prstGeom prst="roundRect">
@@ -2629,7 +2640,7 @@
         </p:blipFill>
         <p:spPr>
           <a:xfrm>
-            <a:off x="6076950" y="1789176"/>
+            <a:off x="6375124" y="1871728"/>
             <a:ext cx="228600" cy="228600"/>
           </a:xfrm>
           <a:prstGeom prst="rect">
@@ -2653,7 +2664,7 @@
         </p:nvSpPr>
         <p:spPr>
           <a:xfrm>
-            <a:off x="6400800" y="1752600"/>
+            <a:off x="6679096" y="1815274"/>
             <a:ext cx="3219450" cy="247650"/>
           </a:xfrm>
           <a:prstGeom prst="rect">
@@ -2677,7 +2688,7 @@
               </a:defRPr>
             </a:pPr>
             <a:r>
-              <a:rPr sz="1275" b="1">
+              <a:rPr sz="1400" b="1" dirty="0">
                 <a:solidFill>
                   <a:srgbClr val="083344"/>
                 </a:solidFill>
@@ -2703,7 +2714,7 @@
         </p:nvSpPr>
         <p:spPr>
           <a:xfrm>
-            <a:off x="1447800" y="2552700"/>
+            <a:off x="1726096" y="2615374"/>
             <a:ext cx="3810000" cy="552450"/>
           </a:xfrm>
           <a:prstGeom prst="roundRect">
@@ -2749,7 +2760,7 @@
         </p:blipFill>
         <p:spPr>
           <a:xfrm>
-            <a:off x="1600200" y="2703576"/>
+            <a:off x="1888435" y="2776189"/>
             <a:ext cx="228600" cy="228600"/>
           </a:xfrm>
           <a:prstGeom prst="rect">
@@ -2773,7 +2784,7 @@
         </p:nvSpPr>
         <p:spPr>
           <a:xfrm>
-            <a:off x="1924050" y="2667000"/>
+            <a:off x="2202346" y="2729674"/>
             <a:ext cx="3219450" cy="247650"/>
           </a:xfrm>
           <a:prstGeom prst="rect">
@@ -2797,7 +2808,7 @@
               </a:defRPr>
             </a:pPr>
             <a:r>
-              <a:rPr sz="1275" b="1">
+              <a:rPr sz="1400" b="1" dirty="0">
                 <a:solidFill>
                   <a:srgbClr val="083344"/>
                 </a:solidFill>
@@ -2823,7 +2834,7 @@
         </p:nvSpPr>
         <p:spPr>
           <a:xfrm>
-            <a:off x="5924550" y="2552700"/>
+            <a:off x="6202846" y="2615374"/>
             <a:ext cx="3810000" cy="552450"/>
           </a:xfrm>
           <a:prstGeom prst="roundRect">
@@ -2869,7 +2880,7 @@
         </p:blipFill>
         <p:spPr>
           <a:xfrm>
-            <a:off x="6076950" y="2703576"/>
+            <a:off x="6375124" y="2786128"/>
             <a:ext cx="228600" cy="228600"/>
           </a:xfrm>
           <a:prstGeom prst="rect">
@@ -2893,7 +2904,7 @@
         </p:nvSpPr>
         <p:spPr>
           <a:xfrm>
-            <a:off x="6400800" y="2667000"/>
+            <a:off x="6679096" y="2729674"/>
             <a:ext cx="3219450" cy="247650"/>
           </a:xfrm>
           <a:prstGeom prst="rect">
@@ -2917,7 +2928,7 @@
               </a:defRPr>
             </a:pPr>
             <a:r>
-              <a:rPr sz="1275" b="1">
+              <a:rPr sz="1400" b="1" dirty="0">
                 <a:solidFill>
                   <a:srgbClr val="083344"/>
                 </a:solidFill>
@@ -2943,7 +2954,7 @@
         </p:nvSpPr>
         <p:spPr>
           <a:xfrm>
-            <a:off x="1447800" y="3467100"/>
+            <a:off x="4111487" y="3613975"/>
             <a:ext cx="3810000" cy="552450"/>
           </a:xfrm>
           <a:prstGeom prst="roundRect">
@@ -2989,7 +3000,7 @@
         </p:blipFill>
         <p:spPr>
           <a:xfrm>
-            <a:off x="1600200" y="3617976"/>
+            <a:off x="4283765" y="3774790"/>
             <a:ext cx="228600" cy="228600"/>
           </a:xfrm>
           <a:prstGeom prst="rect">
@@ -3013,7 +3024,7 @@
         </p:nvSpPr>
         <p:spPr>
           <a:xfrm>
-            <a:off x="1924050" y="3581400"/>
+            <a:off x="4587737" y="3728275"/>
             <a:ext cx="3219450" cy="247650"/>
           </a:xfrm>
           <a:prstGeom prst="rect">
@@ -3037,7 +3048,7 @@
               </a:defRPr>
             </a:pPr>
             <a:r>
-              <a:rPr sz="1275" b="1">
+              <a:rPr sz="1400" b="1" dirty="0">
                 <a:solidFill>
                   <a:srgbClr val="083344"/>
                 </a:solidFill>
@@ -3420,7 +3431,7 @@
         </p:nvSpPr>
         <p:spPr>
           <a:xfrm>
-            <a:off x="2571750" y="3124200"/>
+            <a:off x="2571750" y="3333750"/>
             <a:ext cx="7048500" cy="685800"/>
           </a:xfrm>
           <a:prstGeom prst="rect">
@@ -3444,7 +3455,7 @@
               </a:defRPr>
             </a:pPr>
             <a:r>
-              <a:rPr sz="4350" b="1">
+              <a:rPr sz="4350" b="1" dirty="0">
                 <a:solidFill>
                   <a:srgbClr val="083344"/>
                 </a:solidFill>
@@ -3470,7 +3481,7 @@
         </p:nvSpPr>
         <p:spPr>
           <a:xfrm>
-            <a:off x="3143250" y="3943350"/>
+            <a:off x="3143250" y="2990850"/>
             <a:ext cx="5905500" cy="342900"/>
           </a:xfrm>
           <a:prstGeom prst="rect">
@@ -3494,7 +3505,7 @@
               </a:defRPr>
             </a:pPr>
             <a:r>
-              <a:rPr sz="1950" b="0">
+              <a:rPr sz="1950" b="0" dirty="0">
                 <a:solidFill>
                   <a:srgbClr val="5B6B78"/>
                 </a:solidFill>
@@ -3896,8 +3907,8 @@
         </p:nvSpPr>
         <p:spPr>
           <a:xfrm>
-            <a:off x="1047750" y="1485900"/>
-            <a:ext cx="3048000" cy="723900"/>
+            <a:off x="780330" y="1364861"/>
+            <a:ext cx="4286969" cy="530970"/>
           </a:xfrm>
           <a:prstGeom prst="roundRect">
             <a:avLst>
@@ -3954,7 +3965,7 @@
         </p:blipFill>
         <p:spPr>
           <a:xfrm>
-            <a:off x="1257300" y="1695450"/>
+            <a:off x="989881" y="1505401"/>
             <a:ext cx="304800" cy="304800"/>
           </a:xfrm>
           <a:prstGeom prst="rect">
@@ -3978,7 +3989,7 @@
         </p:nvSpPr>
         <p:spPr>
           <a:xfrm>
-            <a:off x="1714500" y="1666875"/>
+            <a:off x="1447081" y="1468199"/>
             <a:ext cx="2000250" cy="285750"/>
           </a:xfrm>
           <a:prstGeom prst="rect">
@@ -4036,8 +4047,8 @@
         </p:nvSpPr>
         <p:spPr>
           <a:xfrm>
-            <a:off x="4857750" y="1485900"/>
-            <a:ext cx="3343858" cy="723900"/>
+            <a:off x="789991" y="2032049"/>
+            <a:ext cx="4286969" cy="530970"/>
           </a:xfrm>
           <a:prstGeom prst="roundRect">
             <a:avLst>
@@ -4094,7 +4105,7 @@
         </p:blipFill>
         <p:spPr>
           <a:xfrm>
-            <a:off x="5067300" y="1695450"/>
+            <a:off x="999542" y="2163963"/>
             <a:ext cx="304800" cy="304800"/>
           </a:xfrm>
           <a:prstGeom prst="rect">
@@ -4118,7 +4129,7 @@
         </p:nvSpPr>
         <p:spPr>
           <a:xfrm>
-            <a:off x="5524500" y="1666875"/>
+            <a:off x="1456742" y="2126761"/>
             <a:ext cx="2000250" cy="285750"/>
           </a:xfrm>
           <a:prstGeom prst="rect">
@@ -4176,8 +4187,8 @@
         </p:nvSpPr>
         <p:spPr>
           <a:xfrm>
-            <a:off x="1047750" y="2381250"/>
-            <a:ext cx="3048000" cy="723900"/>
+            <a:off x="789992" y="2694933"/>
+            <a:ext cx="4286968" cy="530608"/>
           </a:xfrm>
           <a:prstGeom prst="roundRect">
             <a:avLst>
@@ -4234,7 +4245,7 @@
         </p:blipFill>
         <p:spPr>
           <a:xfrm>
-            <a:off x="1257300" y="2590800"/>
+            <a:off x="999542" y="2818222"/>
             <a:ext cx="304800" cy="304800"/>
           </a:xfrm>
           <a:prstGeom prst="rect">
@@ -4258,7 +4269,7 @@
         </p:nvSpPr>
         <p:spPr>
           <a:xfrm>
-            <a:off x="1714500" y="2562225"/>
+            <a:off x="1456742" y="2798273"/>
             <a:ext cx="2000250" cy="285750"/>
           </a:xfrm>
           <a:prstGeom prst="rect">
@@ -4316,8 +4327,8 @@
         </p:nvSpPr>
         <p:spPr>
           <a:xfrm>
-            <a:off x="4857750" y="2381250"/>
-            <a:ext cx="3343858" cy="723900"/>
+            <a:off x="799655" y="3348830"/>
+            <a:ext cx="4277305" cy="536009"/>
           </a:xfrm>
           <a:prstGeom prst="roundRect">
             <a:avLst>
@@ -4374,7 +4385,7 @@
         </p:blipFill>
         <p:spPr>
           <a:xfrm>
-            <a:off x="5067300" y="2590800"/>
+            <a:off x="1009206" y="3480744"/>
             <a:ext cx="304800" cy="304800"/>
           </a:xfrm>
           <a:prstGeom prst="rect">
@@ -4398,7 +4409,7 @@
         </p:nvSpPr>
         <p:spPr>
           <a:xfrm>
-            <a:off x="5524500" y="2562225"/>
+            <a:off x="1466406" y="3452171"/>
             <a:ext cx="2000250" cy="285750"/>
           </a:xfrm>
           <a:prstGeom prst="rect">
@@ -4456,8 +4467,8 @@
         </p:nvSpPr>
         <p:spPr>
           <a:xfrm>
-            <a:off x="1047750" y="3276600"/>
-            <a:ext cx="3048000" cy="723900"/>
+            <a:off x="799654" y="4025828"/>
+            <a:ext cx="4277303" cy="526199"/>
           </a:xfrm>
           <a:prstGeom prst="roundRect">
             <a:avLst>
@@ -4514,7 +4525,7 @@
         </p:blipFill>
         <p:spPr>
           <a:xfrm>
-            <a:off x="1257300" y="3486150"/>
+            <a:off x="1009207" y="4154235"/>
             <a:ext cx="304800" cy="304800"/>
           </a:xfrm>
           <a:prstGeom prst="rect">
@@ -4538,7 +4549,7 @@
         </p:nvSpPr>
         <p:spPr>
           <a:xfrm>
-            <a:off x="1714500" y="3457575"/>
+            <a:off x="1466407" y="4134286"/>
             <a:ext cx="2000250" cy="285750"/>
           </a:xfrm>
           <a:prstGeom prst="rect">
@@ -4596,8 +4607,8 @@
         </p:nvSpPr>
         <p:spPr>
           <a:xfrm>
-            <a:off x="4857750" y="3276600"/>
-            <a:ext cx="3343858" cy="723900"/>
+            <a:off x="794666" y="4680434"/>
+            <a:ext cx="4277302" cy="524863"/>
           </a:xfrm>
           <a:prstGeom prst="roundRect">
             <a:avLst>
@@ -4654,7 +4665,7 @@
         </p:blipFill>
         <p:spPr>
           <a:xfrm>
-            <a:off x="5067300" y="3486150"/>
+            <a:off x="1009205" y="4810473"/>
             <a:ext cx="304800" cy="304800"/>
           </a:xfrm>
           <a:prstGeom prst="rect">
@@ -4678,7 +4689,7 @@
         </p:nvSpPr>
         <p:spPr>
           <a:xfrm>
-            <a:off x="5524500" y="3438525"/>
+            <a:off x="1466405" y="4771474"/>
             <a:ext cx="2343150" cy="285750"/>
           </a:xfrm>
           <a:prstGeom prst="rect">
@@ -4736,8 +4747,8 @@
         </p:nvSpPr>
         <p:spPr>
           <a:xfrm>
-            <a:off x="1047750" y="4171950"/>
-            <a:ext cx="3048000" cy="723900"/>
+            <a:off x="799653" y="5343312"/>
+            <a:ext cx="4277302" cy="524863"/>
           </a:xfrm>
           <a:prstGeom prst="roundRect">
             <a:avLst>
@@ -4794,7 +4805,7 @@
         </p:blipFill>
         <p:spPr>
           <a:xfrm>
-            <a:off x="1257300" y="4381500"/>
+            <a:off x="1009204" y="5449346"/>
             <a:ext cx="304800" cy="304800"/>
           </a:xfrm>
           <a:prstGeom prst="rect">
@@ -4818,7 +4829,7 @@
         </p:nvSpPr>
         <p:spPr>
           <a:xfrm>
-            <a:off x="1714500" y="4352925"/>
+            <a:off x="1466404" y="5429399"/>
             <a:ext cx="2000250" cy="285750"/>
           </a:xfrm>
           <a:prstGeom prst="rect">
@@ -5035,6 +5046,42 @@
           <a:xfrm>
             <a:off x="10820400" y="326316"/>
             <a:ext cx="1156607" cy="397584"/>
+          </a:xfrm>
+          <a:prstGeom prst="rect">
+            <a:avLst/>
+          </a:prstGeom>
+        </p:spPr>
+      </p:pic>
+      <p:pic>
+        <p:nvPicPr>
+          <p:cNvPr id="27" name="Picture 26">
+            <a:extLst>
+              <a:ext uri="{FF2B5EF4-FFF2-40B4-BE49-F238E27FC236}">
+                <a16:creationId xmlns:a16="http://schemas.microsoft.com/office/drawing/2014/main" id="{663942CE-5B71-1538-8700-BEA60C5B1E43}"/>
+              </a:ext>
+            </a:extLst>
+          </p:cNvPr>
+          <p:cNvPicPr>
+            <a:picLocks noChangeAspect="1"/>
+          </p:cNvPicPr>
+          <p:nvPr/>
+        </p:nvPicPr>
+        <p:blipFill>
+          <a:blip r:embed="rId11">
+            <a:extLst>
+              <a:ext uri="{28A0092B-C50C-407E-A947-70E740481C1C}">
+                <a14:useLocalDpi xmlns:a14="http://schemas.microsoft.com/office/drawing/2010/main" val="0"/>
+              </a:ext>
+            </a:extLst>
+          </a:blip>
+          <a:stretch>
+            <a:fillRect/>
+          </a:stretch>
+        </p:blipFill>
+        <p:spPr>
+          <a:xfrm>
+            <a:off x="5987831" y="1650483"/>
+            <a:ext cx="5016937" cy="3889125"/>
           </a:xfrm>
           <a:prstGeom prst="rect">
             <a:avLst/>
@@ -5439,7 +5486,7 @@
               </a:defRPr>
             </a:pPr>
             <a:r>
-              <a:rPr sz="1275" b="0">
+              <a:rPr sz="1400" b="0" dirty="0">
                 <a:solidFill>
                   <a:srgbClr val="5B6B78"/>
                 </a:solidFill>
@@ -5661,7 +5708,7 @@
               </a:defRPr>
             </a:pPr>
             <a:r>
-              <a:rPr sz="1275" b="0">
+              <a:rPr sz="1400" b="0" dirty="0">
                 <a:solidFill>
                   <a:srgbClr val="5B6B78"/>
                 </a:solidFill>
@@ -5883,7 +5930,7 @@
               </a:defRPr>
             </a:pPr>
             <a:r>
-              <a:rPr sz="1275" b="0" dirty="0">
+              <a:rPr sz="1400" b="0" dirty="0">
                 <a:solidFill>
                   <a:srgbClr val="5B6B78"/>
                 </a:solidFill>
@@ -5891,14 +5938,14 @@
               <a:t>Software engineering and</a:t>
             </a:r>
             <a:r>
-              <a:rPr lang="de-DE" sz="1275" b="0" dirty="0">
+              <a:rPr lang="de-DE" sz="1400" b="0" dirty="0">
                 <a:solidFill>
                   <a:srgbClr val="5B6B78"/>
                 </a:solidFill>
               </a:rPr>
               <a:t> digitalization</a:t>
             </a:r>
-            <a:endParaRPr sz="1275" b="0" dirty="0">
+            <a:endParaRPr sz="1400" b="0" dirty="0">
               <a:solidFill>
                 <a:srgbClr val="5B6B78"/>
               </a:solidFill>
@@ -7132,7 +7179,7 @@
               </a:defRPr>
             </a:pPr>
             <a:r>
-              <a:rPr sz="1275" b="0">
+              <a:rPr sz="1400" b="0" dirty="0">
                 <a:solidFill>
                   <a:srgbClr val="5B6B78"/>
                 </a:solidFill>
@@ -7158,8 +7205,8 @@
         </p:nvSpPr>
         <p:spPr>
           <a:xfrm>
-            <a:off x="3019425" y="2743200"/>
-            <a:ext cx="438150" cy="266700"/>
+            <a:off x="3067050" y="2743200"/>
+            <a:ext cx="390524" cy="266700"/>
           </a:xfrm>
           <a:prstGeom prst="rightArrow">
             <a:avLst/>
@@ -7420,7 +7467,7 @@
         </p:nvSpPr>
         <p:spPr>
           <a:xfrm>
-            <a:off x="3695700" y="3067050"/>
+            <a:off x="3695699" y="3067050"/>
             <a:ext cx="1924050" cy="457200"/>
           </a:xfrm>
           <a:prstGeom prst="rect">
@@ -7444,7 +7491,7 @@
               </a:defRPr>
             </a:pPr>
             <a:r>
-              <a:rPr sz="1275" b="0">
+              <a:rPr sz="1400" b="0" dirty="0">
                 <a:solidFill>
                   <a:srgbClr val="5B6B78"/>
                 </a:solidFill>
@@ -7470,8 +7517,8 @@
         </p:nvSpPr>
         <p:spPr>
           <a:xfrm>
-            <a:off x="5791200" y="2743200"/>
-            <a:ext cx="438150" cy="266700"/>
+            <a:off x="5848350" y="2743200"/>
+            <a:ext cx="381000" cy="266700"/>
           </a:xfrm>
           <a:prstGeom prst="rightArrow">
             <a:avLst/>
@@ -7733,7 +7780,7 @@
         <p:spPr>
           <a:xfrm>
             <a:off x="6477000" y="3067050"/>
-            <a:ext cx="1924050" cy="457200"/>
+            <a:ext cx="2019300" cy="457200"/>
           </a:xfrm>
           <a:prstGeom prst="rect">
             <a:avLst/>
@@ -7756,7 +7803,7 @@
               </a:defRPr>
             </a:pPr>
             <a:r>
-              <a:rPr sz="1275" b="0">
+              <a:rPr sz="1400" b="0" dirty="0">
                 <a:solidFill>
                   <a:srgbClr val="5B6B78"/>
                 </a:solidFill>
@@ -7782,8 +7829,8 @@
         </p:nvSpPr>
         <p:spPr>
           <a:xfrm>
-            <a:off x="8582025" y="2743200"/>
-            <a:ext cx="438150" cy="266700"/>
+            <a:off x="8629650" y="2743200"/>
+            <a:ext cx="390524" cy="266700"/>
           </a:xfrm>
           <a:prstGeom prst="rightArrow">
             <a:avLst/>
@@ -8045,7 +8092,7 @@
         <p:spPr>
           <a:xfrm>
             <a:off x="9258300" y="3067050"/>
-            <a:ext cx="1924050" cy="457200"/>
+            <a:ext cx="2019300" cy="457200"/>
           </a:xfrm>
           <a:prstGeom prst="rect">
             <a:avLst/>
@@ -8068,7 +8115,7 @@
               </a:defRPr>
             </a:pPr>
             <a:r>
-              <a:rPr sz="1275" b="0">
+              <a:rPr sz="1400" b="0" dirty="0">
                 <a:solidFill>
                   <a:srgbClr val="5B6B78"/>
                 </a:solidFill>
@@ -8711,7 +8758,7 @@
         </p:blipFill>
         <p:spPr>
           <a:xfrm>
-            <a:off x="1314450" y="2686050"/>
+            <a:off x="1334328" y="2705928"/>
             <a:ext cx="228600" cy="228600"/>
           </a:xfrm>
           <a:prstGeom prst="rect">
@@ -8759,7 +8806,7 @@
               </a:defRPr>
             </a:pPr>
             <a:r>
-              <a:rPr sz="1275" b="1" dirty="0">
+              <a:rPr sz="1400" b="1" dirty="0">
                 <a:solidFill>
                   <a:srgbClr val="083344"/>
                 </a:solidFill>
@@ -8831,7 +8878,7 @@
         </p:blipFill>
         <p:spPr>
           <a:xfrm>
-            <a:off x="1314450" y="3390900"/>
+            <a:off x="1314450" y="3410778"/>
             <a:ext cx="228600" cy="228600"/>
           </a:xfrm>
           <a:prstGeom prst="rect">
@@ -8879,7 +8926,7 @@
               </a:defRPr>
             </a:pPr>
             <a:r>
-              <a:rPr sz="1275" b="1" dirty="0">
+              <a:rPr sz="1400" b="1" dirty="0">
                 <a:solidFill>
                   <a:srgbClr val="083344"/>
                 </a:solidFill>
@@ -8951,7 +8998,7 @@
         </p:blipFill>
         <p:spPr>
           <a:xfrm>
-            <a:off x="1314450" y="4095750"/>
+            <a:off x="1314450" y="4115628"/>
             <a:ext cx="228600" cy="228600"/>
           </a:xfrm>
           <a:prstGeom prst="rect">
@@ -8999,7 +9046,7 @@
               </a:defRPr>
             </a:pPr>
             <a:r>
-              <a:rPr sz="1275" b="1" dirty="0">
+              <a:rPr sz="1400" b="1" dirty="0">
                 <a:solidFill>
                   <a:srgbClr val="083344"/>
                 </a:solidFill>
@@ -9083,7 +9130,7 @@
         </p:blipFill>
         <p:spPr>
           <a:xfrm>
-            <a:off x="5448300" y="1790700"/>
+            <a:off x="5448300" y="1840395"/>
             <a:ext cx="381000" cy="381000"/>
           </a:xfrm>
           <a:prstGeom prst="rect">
@@ -9131,7 +9178,7 @@
               </a:defRPr>
             </a:pPr>
             <a:r>
-              <a:rPr sz="1350" b="1" dirty="0">
+              <a:rPr sz="1400" b="1" dirty="0">
                 <a:solidFill>
                   <a:srgbClr val="0077B6"/>
                 </a:solidFill>
@@ -9231,7 +9278,7 @@
               </a:defRPr>
             </a:pPr>
             <a:r>
-              <a:rPr sz="1200" b="0" dirty="0">
+              <a:rPr sz="1400" b="0" dirty="0">
                 <a:solidFill>
                   <a:srgbClr val="5B6B78"/>
                 </a:solidFill>
@@ -9315,7 +9362,7 @@
         </p:blipFill>
         <p:spPr>
           <a:xfrm>
-            <a:off x="5448300" y="3009900"/>
+            <a:off x="5448300" y="3039717"/>
             <a:ext cx="381000" cy="381000"/>
           </a:xfrm>
           <a:prstGeom prst="rect">
@@ -9363,7 +9410,7 @@
               </a:defRPr>
             </a:pPr>
             <a:r>
-              <a:rPr sz="1350" b="1" dirty="0">
+              <a:rPr sz="1400" b="1" dirty="0">
                 <a:solidFill>
                   <a:srgbClr val="009999"/>
                 </a:solidFill>
@@ -9463,7 +9510,7 @@
               </a:defRPr>
             </a:pPr>
             <a:r>
-              <a:rPr sz="1200" b="0" dirty="0">
+              <a:rPr sz="1400" b="0" dirty="0">
                 <a:solidFill>
                   <a:srgbClr val="5B6B78"/>
                 </a:solidFill>
@@ -9547,7 +9594,7 @@
         </p:blipFill>
         <p:spPr>
           <a:xfrm>
-            <a:off x="5448300" y="4229100"/>
+            <a:off x="5448300" y="4258917"/>
             <a:ext cx="381000" cy="381000"/>
           </a:xfrm>
           <a:prstGeom prst="rect">
@@ -9571,7 +9618,7 @@
         </p:nvSpPr>
         <p:spPr>
           <a:xfrm>
-            <a:off x="6019800" y="4079748"/>
+            <a:off x="6019800" y="4059870"/>
             <a:ext cx="2095500" cy="228600"/>
           </a:xfrm>
           <a:prstGeom prst="rect">
@@ -9595,7 +9642,7 @@
               </a:defRPr>
             </a:pPr>
             <a:r>
-              <a:rPr sz="1350" b="1" dirty="0">
+              <a:rPr sz="1400" b="1" dirty="0">
                 <a:solidFill>
                   <a:srgbClr val="2CA58D"/>
                 </a:solidFill>
@@ -9621,7 +9668,7 @@
         </p:nvSpPr>
         <p:spPr>
           <a:xfrm>
-            <a:off x="6019800" y="4328160"/>
+            <a:off x="6019800" y="4288404"/>
             <a:ext cx="4000500" cy="228600"/>
           </a:xfrm>
           <a:prstGeom prst="rect">
@@ -9671,7 +9718,7 @@
         </p:nvSpPr>
         <p:spPr>
           <a:xfrm>
-            <a:off x="6019800" y="4613148"/>
+            <a:off x="6019800" y="4583331"/>
             <a:ext cx="4000500" cy="209550"/>
           </a:xfrm>
           <a:prstGeom prst="rect">
@@ -9695,7 +9742,7 @@
               </a:defRPr>
             </a:pPr>
             <a:r>
-              <a:rPr sz="1200" b="0" dirty="0">
+              <a:rPr sz="1400" b="0" dirty="0">
                 <a:solidFill>
                   <a:srgbClr val="5B6B78"/>
                 </a:solidFill>
@@ -10297,7 +10344,7 @@
         <p:spPr>
           <a:xfrm>
             <a:off x="1219200" y="2533650"/>
-            <a:ext cx="3429000" cy="457200"/>
+            <a:ext cx="3467100" cy="457200"/>
           </a:xfrm>
           <a:prstGeom prst="roundRect">
             <a:avLst>
@@ -10366,7 +10413,7 @@
         </p:nvSpPr>
         <p:spPr>
           <a:xfrm>
-            <a:off x="1695450" y="2628900"/>
+            <a:off x="1675572" y="2609022"/>
             <a:ext cx="2838450" cy="247650"/>
           </a:xfrm>
           <a:prstGeom prst="rect">
@@ -10390,7 +10437,7 @@
               </a:defRPr>
             </a:pPr>
             <a:r>
-              <a:rPr sz="1275" b="1" dirty="0">
+              <a:rPr sz="1400" b="1" dirty="0">
                 <a:solidFill>
                   <a:srgbClr val="083344"/>
                 </a:solidFill>
@@ -10417,7 +10464,7 @@
         <p:spPr>
           <a:xfrm>
             <a:off x="1219200" y="3086100"/>
-            <a:ext cx="3429000" cy="457200"/>
+            <a:ext cx="3467100" cy="457200"/>
           </a:xfrm>
           <a:prstGeom prst="roundRect">
             <a:avLst>
@@ -10486,7 +10533,7 @@
         </p:nvSpPr>
         <p:spPr>
           <a:xfrm>
-            <a:off x="1695450" y="3181350"/>
+            <a:off x="1675572" y="3161472"/>
             <a:ext cx="2838450" cy="247650"/>
           </a:xfrm>
           <a:prstGeom prst="rect">
@@ -10510,7 +10557,7 @@
               </a:defRPr>
             </a:pPr>
             <a:r>
-              <a:rPr sz="1275" b="1" dirty="0">
+              <a:rPr sz="1400" b="1" dirty="0">
                 <a:solidFill>
                   <a:srgbClr val="083344"/>
                 </a:solidFill>
@@ -10537,7 +10584,7 @@
         <p:spPr>
           <a:xfrm>
             <a:off x="1219200" y="3638550"/>
-            <a:ext cx="3429000" cy="457200"/>
+            <a:ext cx="3467100" cy="457200"/>
           </a:xfrm>
           <a:prstGeom prst="roundRect">
             <a:avLst>
@@ -10606,7 +10653,7 @@
         </p:nvSpPr>
         <p:spPr>
           <a:xfrm>
-            <a:off x="1695450" y="3733800"/>
+            <a:off x="1675572" y="3713922"/>
             <a:ext cx="2838450" cy="247650"/>
           </a:xfrm>
           <a:prstGeom prst="rect">
@@ -10630,7 +10677,7 @@
               </a:defRPr>
             </a:pPr>
             <a:r>
-              <a:rPr sz="1275" b="1" dirty="0">
+              <a:rPr sz="1400" b="1" dirty="0">
                 <a:solidFill>
                   <a:srgbClr val="083344"/>
                 </a:solidFill>
@@ -10657,7 +10704,7 @@
         <p:spPr>
           <a:xfrm>
             <a:off x="1219200" y="4191000"/>
-            <a:ext cx="3429000" cy="457200"/>
+            <a:ext cx="3467100" cy="457200"/>
           </a:xfrm>
           <a:prstGeom prst="roundRect">
             <a:avLst>
@@ -10726,8 +10773,8 @@
         </p:nvSpPr>
         <p:spPr>
           <a:xfrm>
-            <a:off x="1695450" y="4286250"/>
-            <a:ext cx="2838450" cy="247650"/>
+            <a:off x="1675572" y="4266372"/>
+            <a:ext cx="2990850" cy="247650"/>
           </a:xfrm>
           <a:prstGeom prst="rect">
             <a:avLst/>
@@ -10750,7 +10797,7 @@
               </a:defRPr>
             </a:pPr>
             <a:r>
-              <a:rPr sz="1275" b="1" dirty="0">
+              <a:rPr sz="1400" b="1" dirty="0">
                 <a:solidFill>
                   <a:srgbClr val="083344"/>
                 </a:solidFill>
@@ -10846,7 +10893,7 @@
         </p:nvSpPr>
         <p:spPr>
           <a:xfrm>
-            <a:off x="7372350" y="2628900"/>
+            <a:off x="7372350" y="2609022"/>
             <a:ext cx="3048000" cy="247650"/>
           </a:xfrm>
           <a:prstGeom prst="rect">
@@ -10870,7 +10917,7 @@
               </a:defRPr>
             </a:pPr>
             <a:r>
-              <a:rPr sz="1275" b="1" dirty="0">
+              <a:rPr sz="1400" b="1" dirty="0">
                 <a:solidFill>
                   <a:srgbClr val="083344"/>
                 </a:solidFill>
@@ -10966,7 +11013,7 @@
         </p:nvSpPr>
         <p:spPr>
           <a:xfrm>
-            <a:off x="7372350" y="3181350"/>
+            <a:off x="7372350" y="3161472"/>
             <a:ext cx="3048000" cy="247650"/>
           </a:xfrm>
           <a:prstGeom prst="rect">
@@ -10990,7 +11037,7 @@
               </a:defRPr>
             </a:pPr>
             <a:r>
-              <a:rPr sz="1275" b="1" dirty="0">
+              <a:rPr sz="1400" b="1" dirty="0">
                 <a:solidFill>
                   <a:srgbClr val="083344"/>
                 </a:solidFill>
@@ -11086,7 +11133,7 @@
         </p:nvSpPr>
         <p:spPr>
           <a:xfrm>
-            <a:off x="7372350" y="3733800"/>
+            <a:off x="7372350" y="3713922"/>
             <a:ext cx="3048000" cy="247650"/>
           </a:xfrm>
           <a:prstGeom prst="rect">
@@ -11110,7 +11157,7 @@
               </a:defRPr>
             </a:pPr>
             <a:r>
-              <a:rPr sz="1275" b="1" dirty="0">
+              <a:rPr sz="1400" b="1" dirty="0">
                 <a:solidFill>
                   <a:srgbClr val="083344"/>
                 </a:solidFill>
@@ -11206,7 +11253,7 @@
         </p:nvSpPr>
         <p:spPr>
           <a:xfrm>
-            <a:off x="7372350" y="4286250"/>
+            <a:off x="7372350" y="4266372"/>
             <a:ext cx="3048000" cy="247650"/>
           </a:xfrm>
           <a:prstGeom prst="rect">
@@ -11230,7 +11277,7 @@
               </a:defRPr>
             </a:pPr>
             <a:r>
-              <a:rPr sz="1275" b="1" dirty="0">
+              <a:rPr sz="1400" b="1" dirty="0">
                 <a:solidFill>
                   <a:srgbClr val="083344"/>
                 </a:solidFill>
@@ -11623,8 +11670,8 @@
         </p:nvSpPr>
         <p:spPr>
           <a:xfrm>
-            <a:off x="895350" y="1314450"/>
-            <a:ext cx="4095750" cy="4800600"/>
+            <a:off x="771525" y="1314450"/>
+            <a:ext cx="4762500" cy="4800600"/>
           </a:xfrm>
           <a:prstGeom prst="roundRect">
             <a:avLst>
@@ -11661,30 +11708,6 @@
           </a:p>
         </p:txBody>
       </p:sp>
-      <p:pic>
-        <p:nvPicPr>
-          <p:cNvPr id="32" name="Picture 31"/>
-          <p:cNvPicPr>
-            <a:picLocks noChangeAspect="1"/>
-          </p:cNvPicPr>
-          <p:nvPr/>
-        </p:nvPicPr>
-        <p:blipFill>
-          <a:blip r:embed="rId3"/>
-          <a:stretch/>
-        </p:blipFill>
-        <p:spPr>
-          <a:xfrm>
-            <a:off x="1433680" y="1485900"/>
-            <a:ext cx="3019090" cy="4457700"/>
-          </a:xfrm>
-          <a:prstGeom prst="roundRect">
-            <a:avLst>
-              <a:gd name="adj" fmla="val 2030"/>
-            </a:avLst>
-          </a:prstGeom>
-        </p:spPr>
-      </p:pic>
       <p:sp>
         <p:nvSpPr>
           <p:cNvPr id="6" name="Rectangle: Rounded Corners 5">
@@ -11701,8 +11724,8 @@
         </p:nvSpPr>
         <p:spPr>
           <a:xfrm>
-            <a:off x="5619750" y="1390650"/>
-            <a:ext cx="5334000" cy="857250"/>
+            <a:off x="5829300" y="1461630"/>
+            <a:ext cx="4914900" cy="857250"/>
           </a:xfrm>
           <a:prstGeom prst="roundRect">
             <a:avLst>
@@ -11755,7 +11778,7 @@
         </p:nvSpPr>
         <p:spPr>
           <a:xfrm>
-            <a:off x="5829300" y="1619250"/>
+            <a:off x="6062870" y="1649749"/>
             <a:ext cx="495300" cy="495300"/>
           </a:xfrm>
           <a:prstGeom prst="ellipse">
@@ -11791,7 +11814,7 @@
           <a:blip>
             <a:extLst>
               <a:ext uri="{96DAC541-7B7A-43D3-8B79-37D633B846F1}">
-                <asvg:svgBlip xmlns:asvg="http://schemas.microsoft.com/office/drawing/2016/SVG/main" r:embed="rId4"/>
+                <asvg:svgBlip xmlns:asvg="http://schemas.microsoft.com/office/drawing/2016/SVG/main" r:embed="rId3"/>
               </a:ext>
             </a:extLst>
           </a:blip>
@@ -11799,7 +11822,7 @@
         </p:blipFill>
         <p:spPr>
           <a:xfrm>
-            <a:off x="5953125" y="1743075"/>
+            <a:off x="6186695" y="1773574"/>
             <a:ext cx="247650" cy="247650"/>
           </a:xfrm>
           <a:prstGeom prst="rect">
@@ -11823,8 +11846,8 @@
         </p:nvSpPr>
         <p:spPr>
           <a:xfrm>
-            <a:off x="6515100" y="1582674"/>
-            <a:ext cx="4229100" cy="285750"/>
+            <a:off x="6694004" y="1612491"/>
+            <a:ext cx="1625048" cy="285750"/>
           </a:xfrm>
           <a:prstGeom prst="rect">
             <a:avLst/>
@@ -11873,8 +11896,8 @@
         </p:nvSpPr>
         <p:spPr>
           <a:xfrm>
-            <a:off x="6515100" y="1861185"/>
-            <a:ext cx="4229100" cy="514350"/>
+            <a:off x="6694004" y="1891002"/>
+            <a:ext cx="1802296" cy="283845"/>
           </a:xfrm>
           <a:prstGeom prst="rect">
             <a:avLst/>
@@ -11923,8 +11946,8 @@
         </p:nvSpPr>
         <p:spPr>
           <a:xfrm>
-            <a:off x="5619750" y="2495550"/>
-            <a:ext cx="5334000" cy="857250"/>
+            <a:off x="5829300" y="2595677"/>
+            <a:ext cx="4914900" cy="857250"/>
           </a:xfrm>
           <a:prstGeom prst="roundRect">
             <a:avLst>
@@ -11977,7 +12000,7 @@
         </p:nvSpPr>
         <p:spPr>
           <a:xfrm>
-            <a:off x="5829300" y="2724150"/>
+            <a:off x="6059143" y="2775585"/>
             <a:ext cx="495300" cy="495300"/>
           </a:xfrm>
           <a:prstGeom prst="ellipse">
@@ -12013,7 +12036,7 @@
           <a:blip>
             <a:extLst>
               <a:ext uri="{96DAC541-7B7A-43D3-8B79-37D633B846F1}">
-                <asvg:svgBlip xmlns:asvg="http://schemas.microsoft.com/office/drawing/2016/SVG/main" r:embed="rId5"/>
+                <asvg:svgBlip xmlns:asvg="http://schemas.microsoft.com/office/drawing/2016/SVG/main" r:embed="rId4"/>
               </a:ext>
             </a:extLst>
           </a:blip>
@@ -12021,7 +12044,7 @@
         </p:blipFill>
         <p:spPr>
           <a:xfrm>
-            <a:off x="5953125" y="2847975"/>
+            <a:off x="6182968" y="2899410"/>
             <a:ext cx="247650" cy="247650"/>
           </a:xfrm>
           <a:prstGeom prst="rect">
@@ -12045,8 +12068,8 @@
         </p:nvSpPr>
         <p:spPr>
           <a:xfrm>
-            <a:off x="6515100" y="2687574"/>
-            <a:ext cx="4229100" cy="285750"/>
+            <a:off x="6694004" y="2726998"/>
+            <a:ext cx="3583057" cy="285750"/>
           </a:xfrm>
           <a:prstGeom prst="rect">
             <a:avLst/>
@@ -12069,13 +12092,34 @@
               </a:defRPr>
             </a:pPr>
             <a:r>
+              <a:rPr lang="en-US" sz="1575" b="1" dirty="0">
+                <a:solidFill>
+                  <a:srgbClr val="083344"/>
+                </a:solidFill>
+              </a:rPr>
+              <a:t>Document </a:t>
+            </a:r>
+            <a:r>
               <a:rPr sz="1575" b="1" dirty="0">
                 <a:solidFill>
                   <a:srgbClr val="083344"/>
                 </a:solidFill>
               </a:rPr>
-              <a:t>Processing pipeline</a:t>
-            </a:r>
+              <a:t>Processing</a:t>
+            </a:r>
+            <a:r>
+              <a:rPr lang="en-US" sz="1575" b="1" dirty="0">
+                <a:solidFill>
+                  <a:srgbClr val="083344"/>
+                </a:solidFill>
+              </a:rPr>
+              <a:t> &amp; Embedding</a:t>
+            </a:r>
+            <a:endParaRPr sz="1575" b="1" dirty="0">
+              <a:solidFill>
+                <a:srgbClr val="083344"/>
+              </a:solidFill>
+            </a:endParaRPr>
           </a:p>
         </p:txBody>
       </p:sp>
@@ -12095,8 +12139,8 @@
         </p:nvSpPr>
         <p:spPr>
           <a:xfrm>
-            <a:off x="6515100" y="2966085"/>
-            <a:ext cx="4229100" cy="514350"/>
+            <a:off x="6694004" y="3016501"/>
+            <a:ext cx="3016526" cy="285750"/>
           </a:xfrm>
           <a:prstGeom prst="rect">
             <a:avLst/>
@@ -12111,7 +12155,7 @@
           <a:bodyPr/>
           <a:lstStyle/>
           <a:p>
-            <a:pPr algn="l">
+            <a:pPr>
               <a:defRPr sz="1275" b="0">
                 <a:solidFill>
                   <a:srgbClr val="5B6B78"/>
@@ -12119,13 +12163,30 @@
               </a:defRPr>
             </a:pPr>
             <a:r>
-              <a:rPr sz="1275" b="0" dirty="0">
+              <a:rPr lang="en-US" sz="1275" b="0" dirty="0">
                 <a:solidFill>
                   <a:srgbClr val="5B6B78"/>
                 </a:solidFill>
               </a:rPr>
-              <a:t>OCR and text extraction</a:t>
-            </a:r>
+              <a:t>Poppler &amp; </a:t>
+            </a:r>
+            <a:r>
+              <a:rPr lang="en-US" sz="1275" dirty="0"/>
+              <a:t>Tesseract</a:t>
+            </a:r>
+            <a:r>
+              <a:rPr lang="en-US" sz="1275" b="0" dirty="0">
+                <a:solidFill>
+                  <a:srgbClr val="5B6B78"/>
+                </a:solidFill>
+              </a:rPr>
+              <a:t> OCR</a:t>
+            </a:r>
+            <a:endParaRPr sz="1275" b="0" dirty="0">
+              <a:solidFill>
+                <a:srgbClr val="5B6B78"/>
+              </a:solidFill>
+            </a:endParaRPr>
           </a:p>
         </p:txBody>
       </p:sp>
@@ -12145,8 +12206,8 @@
         </p:nvSpPr>
         <p:spPr>
           <a:xfrm>
-            <a:off x="5619750" y="3600450"/>
-            <a:ext cx="5334000" cy="857250"/>
+            <a:off x="5829300" y="3729533"/>
+            <a:ext cx="4914900" cy="857250"/>
           </a:xfrm>
           <a:prstGeom prst="roundRect">
             <a:avLst>
@@ -12199,7 +12260,7 @@
         </p:nvSpPr>
         <p:spPr>
           <a:xfrm>
-            <a:off x="5829300" y="3829050"/>
+            <a:off x="6059143" y="3918852"/>
             <a:ext cx="495300" cy="495300"/>
           </a:xfrm>
           <a:prstGeom prst="ellipse">
@@ -12235,7 +12296,7 @@
           <a:blip>
             <a:extLst>
               <a:ext uri="{96DAC541-7B7A-43D3-8B79-37D633B846F1}">
-                <asvg:svgBlip xmlns:asvg="http://schemas.microsoft.com/office/drawing/2016/SVG/main" r:embed="rId6"/>
+                <asvg:svgBlip xmlns:asvg="http://schemas.microsoft.com/office/drawing/2016/SVG/main" r:embed="rId5"/>
               </a:ext>
             </a:extLst>
           </a:blip>
@@ -12243,7 +12304,7 @@
         </p:blipFill>
         <p:spPr>
           <a:xfrm>
-            <a:off x="5953125" y="3952875"/>
+            <a:off x="6182968" y="4042677"/>
             <a:ext cx="247650" cy="247650"/>
           </a:xfrm>
           <a:prstGeom prst="rect">
@@ -12267,7 +12328,7 @@
         </p:nvSpPr>
         <p:spPr>
           <a:xfrm>
-            <a:off x="6515100" y="3792474"/>
+            <a:off x="6694004" y="3845500"/>
             <a:ext cx="4229100" cy="285750"/>
           </a:xfrm>
           <a:prstGeom prst="rect">
@@ -12291,12 +12352,20 @@
               </a:defRPr>
             </a:pPr>
             <a:r>
+              <a:rPr lang="en-US" sz="1575" b="1" dirty="0">
+                <a:solidFill>
+                  <a:srgbClr val="083344"/>
+                </a:solidFill>
+              </a:rPr>
+              <a:t>Database &amp; Ve</a:t>
+            </a:r>
+            <a:r>
               <a:rPr sz="1575" b="1" dirty="0">
                 <a:solidFill>
                   <a:srgbClr val="083344"/>
                 </a:solidFill>
               </a:rPr>
-              <a:t>Vector storage</a:t>
+              <a:t>ctor storage</a:t>
             </a:r>
           </a:p>
         </p:txBody>
@@ -12317,8 +12386,8 @@
         </p:nvSpPr>
         <p:spPr>
           <a:xfrm>
-            <a:off x="6515100" y="4070985"/>
-            <a:ext cx="4229100" cy="514350"/>
+            <a:off x="6694004" y="4160718"/>
+            <a:ext cx="4229100" cy="305211"/>
           </a:xfrm>
           <a:prstGeom prst="rect">
             <a:avLst/>
@@ -12346,8 +12415,37 @@
                   <a:srgbClr val="5B6B78"/>
                 </a:solidFill>
               </a:rPr>
-              <a:t>PostgreSQL with vectors</a:t>
-            </a:r>
+              <a:t>PostgreSQL with </a:t>
+            </a:r>
+            <a:r>
+              <a:rPr lang="en-US" sz="1275" b="0" dirty="0" err="1">
+                <a:solidFill>
+                  <a:srgbClr val="5B6B78"/>
+                </a:solidFill>
+              </a:rPr>
+              <a:t>pgv</a:t>
+            </a:r>
+            <a:r>
+              <a:rPr sz="1275" b="0" dirty="0" err="1">
+                <a:solidFill>
+                  <a:srgbClr val="5B6B78"/>
+                </a:solidFill>
+              </a:rPr>
+              <a:t>ector</a:t>
+            </a:r>
+            <a:r>
+              <a:rPr lang="en-US" sz="1275" b="0" dirty="0">
+                <a:solidFill>
+                  <a:srgbClr val="5B6B78"/>
+                </a:solidFill>
+              </a:rPr>
+              <a:t> extension</a:t>
+            </a:r>
+            <a:endParaRPr sz="1275" b="0" dirty="0">
+              <a:solidFill>
+                <a:srgbClr val="5B6B78"/>
+              </a:solidFill>
+            </a:endParaRPr>
           </a:p>
         </p:txBody>
       </p:sp>
@@ -12367,8 +12465,8 @@
         </p:nvSpPr>
         <p:spPr>
           <a:xfrm>
-            <a:off x="5619750" y="4705350"/>
-            <a:ext cx="5334000" cy="857250"/>
+            <a:off x="5829300" y="4852646"/>
+            <a:ext cx="4914900" cy="857250"/>
           </a:xfrm>
           <a:prstGeom prst="roundRect">
             <a:avLst>
@@ -12421,7 +12519,7 @@
         </p:nvSpPr>
         <p:spPr>
           <a:xfrm>
-            <a:off x="5829300" y="4933950"/>
+            <a:off x="6059143" y="5043488"/>
             <a:ext cx="495300" cy="495300"/>
           </a:xfrm>
           <a:prstGeom prst="ellipse">
@@ -12457,7 +12555,7 @@
           <a:blip>
             <a:extLst>
               <a:ext uri="{96DAC541-7B7A-43D3-8B79-37D633B846F1}">
-                <asvg:svgBlip xmlns:asvg="http://schemas.microsoft.com/office/drawing/2016/SVG/main" r:embed="rId7"/>
+                <asvg:svgBlip xmlns:asvg="http://schemas.microsoft.com/office/drawing/2016/SVG/main" r:embed="rId6"/>
               </a:ext>
             </a:extLst>
           </a:blip>
@@ -12465,7 +12563,7 @@
         </p:blipFill>
         <p:spPr>
           <a:xfrm>
-            <a:off x="5953125" y="5057775"/>
+            <a:off x="6182968" y="5167313"/>
             <a:ext cx="247650" cy="247650"/>
           </a:xfrm>
           <a:prstGeom prst="rect">
@@ -12489,7 +12587,7 @@
         </p:nvSpPr>
         <p:spPr>
           <a:xfrm>
-            <a:off x="6515100" y="4897374"/>
+            <a:off x="6694004" y="4964108"/>
             <a:ext cx="4229100" cy="285750"/>
           </a:xfrm>
           <a:prstGeom prst="rect">
@@ -12539,7 +12637,7 @@
         </p:nvSpPr>
         <p:spPr>
           <a:xfrm>
-            <a:off x="6515100" y="5175885"/>
+            <a:off x="6694004" y="5254902"/>
             <a:ext cx="4229100" cy="514350"/>
           </a:xfrm>
           <a:prstGeom prst="rect">
@@ -12733,7 +12831,7 @@
           <p:nvPr/>
         </p:nvPicPr>
         <p:blipFill>
-          <a:blip r:embed="rId8">
+          <a:blip r:embed="rId7">
             <a:extLst>
               <a:ext uri="{28A0092B-C50C-407E-A947-70E740481C1C}">
                 <a14:useLocalDpi xmlns:a14="http://schemas.microsoft.com/office/drawing/2010/main" val="0"/>
@@ -12748,6 +12846,41 @@
           <a:xfrm>
             <a:off x="10820400" y="326316"/>
             <a:ext cx="1156607" cy="397584"/>
+          </a:xfrm>
+          <a:prstGeom prst="rect">
+            <a:avLst/>
+          </a:prstGeom>
+        </p:spPr>
+      </p:pic>
+      <p:pic>
+        <p:nvPicPr>
+          <p:cNvPr id="30" name="Graphic 29">
+            <a:extLst>
+              <a:ext uri="{FF2B5EF4-FFF2-40B4-BE49-F238E27FC236}">
+                <a16:creationId xmlns:a16="http://schemas.microsoft.com/office/drawing/2014/main" id="{C7E3C91B-56DD-AD5F-C242-180046E522AA}"/>
+              </a:ext>
+            </a:extLst>
+          </p:cNvPr>
+          <p:cNvPicPr>
+            <a:picLocks noChangeAspect="1"/>
+          </p:cNvPicPr>
+          <p:nvPr/>
+        </p:nvPicPr>
+        <p:blipFill>
+          <a:blip>
+            <a:extLst>
+              <a:ext uri="{96DAC541-7B7A-43D3-8B79-37D633B846F1}">
+                <asvg:svgBlip xmlns:asvg="http://schemas.microsoft.com/office/drawing/2016/SVG/main" r:embed="rId8"/>
+              </a:ext>
+            </a:extLst>
+          </a:blip>
+          <a:srcRect/>
+          <a:stretch/>
+        </p:blipFill>
+        <p:spPr>
+          <a:xfrm>
+            <a:off x="901148" y="1700047"/>
+            <a:ext cx="4495800" cy="3876675"/>
           </a:xfrm>
           <a:prstGeom prst="rect">
             <a:avLst/>
@@ -12956,8 +13089,8 @@
         </p:nvSpPr>
         <p:spPr>
           <a:xfrm>
-            <a:off x="666750" y="1352550"/>
-            <a:ext cx="4953000" cy="3143250"/>
+            <a:off x="785564" y="1199316"/>
+            <a:ext cx="4920830" cy="3762792"/>
           </a:xfrm>
           <a:prstGeom prst="roundRect">
             <a:avLst>
@@ -12994,39 +13127,6 @@
           </a:p>
         </p:txBody>
       </p:sp>
-      <p:pic>
-        <p:nvPicPr>
-          <p:cNvPr id="31" name="Picture 30"/>
-          <p:cNvPicPr>
-            <a:picLocks noChangeAspect="1"/>
-          </p:cNvPicPr>
-          <p:nvPr/>
-        </p:nvPicPr>
-        <p:blipFill>
-          <a:blip r:embed="rId3">
-            <a:extLst>
-              <a:ext uri="{28A0092B-C50C-407E-A947-70E740481C1C}">
-                <a14:useLocalDpi xmlns:a14="http://schemas.microsoft.com/office/drawing/2010/main" val="0"/>
-              </a:ext>
-            </a:extLst>
-          </a:blip>
-          <a:srcRect l="1183" r="1183" b="9023"/>
-          <a:stretch>
-            <a:fillRect/>
-          </a:stretch>
-        </p:blipFill>
-        <p:spPr>
-          <a:xfrm>
-            <a:off x="1039500" y="1524000"/>
-            <a:ext cx="4207500" cy="2800350"/>
-          </a:xfrm>
-          <a:prstGeom prst="roundRect">
-            <a:avLst>
-              <a:gd name="adj" fmla="val 2721"/>
-            </a:avLst>
-          </a:prstGeom>
-        </p:spPr>
-      </p:pic>
       <p:sp>
         <p:nvSpPr>
           <p:cNvPr id="6" name="Rectangle: Rounded Corners 5">
@@ -13043,8 +13143,8 @@
         </p:nvSpPr>
         <p:spPr>
           <a:xfrm>
-            <a:off x="6210300" y="1352550"/>
-            <a:ext cx="5334000" cy="3143250"/>
+            <a:off x="6150210" y="1219200"/>
+            <a:ext cx="4879739" cy="3762792"/>
           </a:xfrm>
           <a:prstGeom prst="roundRect">
             <a:avLst>
@@ -13081,30 +13181,6 @@
           </a:p>
         </p:txBody>
       </p:sp>
-      <p:pic>
-        <p:nvPicPr>
-          <p:cNvPr id="33" name="Picture 32"/>
-          <p:cNvPicPr>
-            <a:picLocks noChangeAspect="1"/>
-          </p:cNvPicPr>
-          <p:nvPr/>
-        </p:nvPicPr>
-        <p:blipFill>
-          <a:blip r:embed="rId4"/>
-          <a:stretch/>
-        </p:blipFill>
-        <p:spPr>
-          <a:xfrm>
-            <a:off x="6655187" y="1524000"/>
-            <a:ext cx="4444226" cy="2800350"/>
-          </a:xfrm>
-          <a:prstGeom prst="roundRect">
-            <a:avLst>
-              <a:gd name="adj" fmla="val 2721"/>
-            </a:avLst>
-          </a:prstGeom>
-        </p:spPr>
-      </p:pic>
       <p:sp>
         <p:nvSpPr>
           <p:cNvPr id="8" name="Rectangle 7">
@@ -13121,7 +13197,7 @@
         </p:nvSpPr>
         <p:spPr>
           <a:xfrm>
-            <a:off x="876300" y="4629150"/>
+            <a:off x="2686050" y="4981992"/>
             <a:ext cx="1905000" cy="228600"/>
           </a:xfrm>
           <a:prstGeom prst="rect">
@@ -13145,7 +13221,7 @@
               </a:defRPr>
             </a:pPr>
             <a:r>
-              <a:rPr sz="1500" b="1">
+              <a:rPr sz="1500" b="1" dirty="0">
                 <a:solidFill>
                   <a:srgbClr val="0077B6"/>
                 </a:solidFill>
@@ -13171,8 +13247,8 @@
         </p:nvSpPr>
         <p:spPr>
           <a:xfrm>
-            <a:off x="6419850" y="4629150"/>
-            <a:ext cx="2286000" cy="228600"/>
+            <a:off x="7972395" y="4981992"/>
+            <a:ext cx="2286000" cy="335444"/>
           </a:xfrm>
           <a:prstGeom prst="rect">
             <a:avLst/>
@@ -13195,13 +13271,26 @@
               </a:defRPr>
             </a:pPr>
             <a:r>
-              <a:rPr sz="1500" b="1">
+              <a:rPr sz="1500" b="1" dirty="0">
                 <a:solidFill>
                   <a:srgbClr val="009999"/>
                 </a:solidFill>
               </a:rPr>
-              <a:t>Database model</a:t>
-            </a:r>
+              <a:t>Database </a:t>
+            </a:r>
+            <a:r>
+              <a:rPr lang="en-US" sz="1500" b="1" dirty="0">
+                <a:solidFill>
+                  <a:srgbClr val="009999"/>
+                </a:solidFill>
+              </a:rPr>
+              <a:t>Design</a:t>
+            </a:r>
+            <a:endParaRPr sz="1500" b="1" dirty="0">
+              <a:solidFill>
+                <a:srgbClr val="009999"/>
+              </a:solidFill>
+            </a:endParaRPr>
           </a:p>
         </p:txBody>
       </p:sp>
@@ -13221,7 +13310,7 @@
         </p:nvSpPr>
         <p:spPr>
           <a:xfrm>
-            <a:off x="876300" y="5276850"/>
+            <a:off x="809625" y="5535264"/>
             <a:ext cx="1809750" cy="438150"/>
           </a:xfrm>
           <a:prstGeom prst="roundRect">
@@ -13259,7 +13348,7 @@
           <a:blip>
             <a:extLst>
               <a:ext uri="{96DAC541-7B7A-43D3-8B79-37D633B846F1}">
-                <asvg:svgBlip xmlns:asvg="http://schemas.microsoft.com/office/drawing/2016/SVG/main" r:embed="rId5"/>
+                <asvg:svgBlip xmlns:asvg="http://schemas.microsoft.com/office/drawing/2016/SVG/main" r:embed="rId3"/>
               </a:ext>
             </a:extLst>
           </a:blip>
@@ -13267,7 +13356,7 @@
         </p:blipFill>
         <p:spPr>
           <a:xfrm>
-            <a:off x="1028700" y="5391150"/>
+            <a:off x="1197663" y="5649564"/>
             <a:ext cx="228600" cy="228600"/>
           </a:xfrm>
           <a:prstGeom prst="rect">
@@ -13291,7 +13380,7 @@
         </p:nvSpPr>
         <p:spPr>
           <a:xfrm>
-            <a:off x="1352550" y="5354574"/>
+            <a:off x="1521513" y="5612988"/>
             <a:ext cx="1219200" cy="247650"/>
           </a:xfrm>
           <a:prstGeom prst="rect">
@@ -13354,7 +13443,7 @@
         </p:nvSpPr>
         <p:spPr>
           <a:xfrm>
-            <a:off x="2990850" y="5276850"/>
+            <a:off x="2970972" y="5535264"/>
             <a:ext cx="1809750" cy="438150"/>
           </a:xfrm>
           <a:prstGeom prst="roundRect">
@@ -13392,7 +13481,7 @@
           <a:blip>
             <a:extLst>
               <a:ext uri="{96DAC541-7B7A-43D3-8B79-37D633B846F1}">
-                <asvg:svgBlip xmlns:asvg="http://schemas.microsoft.com/office/drawing/2016/SVG/main" r:embed="rId6"/>
+                <asvg:svgBlip xmlns:asvg="http://schemas.microsoft.com/office/drawing/2016/SVG/main" r:embed="rId4"/>
               </a:ext>
             </a:extLst>
           </a:blip>
@@ -13400,7 +13489,7 @@
         </p:blipFill>
         <p:spPr>
           <a:xfrm>
-            <a:off x="3143250" y="5391150"/>
+            <a:off x="3302274" y="5649564"/>
             <a:ext cx="228600" cy="228600"/>
           </a:xfrm>
           <a:prstGeom prst="rect">
@@ -13424,7 +13513,7 @@
         </p:nvSpPr>
         <p:spPr>
           <a:xfrm>
-            <a:off x="3467100" y="5354574"/>
+            <a:off x="3596307" y="5612988"/>
             <a:ext cx="1219200" cy="247650"/>
           </a:xfrm>
           <a:prstGeom prst="rect">
@@ -13487,7 +13576,7 @@
         </p:nvSpPr>
         <p:spPr>
           <a:xfrm>
-            <a:off x="5105400" y="5276850"/>
+            <a:off x="5065644" y="5535264"/>
             <a:ext cx="1809750" cy="438150"/>
           </a:xfrm>
           <a:prstGeom prst="roundRect">
@@ -13525,7 +13614,7 @@
           <a:blip>
             <a:extLst>
               <a:ext uri="{96DAC541-7B7A-43D3-8B79-37D633B846F1}">
-                <asvg:svgBlip xmlns:asvg="http://schemas.microsoft.com/office/drawing/2016/SVG/main" r:embed="rId7"/>
+                <asvg:svgBlip xmlns:asvg="http://schemas.microsoft.com/office/drawing/2016/SVG/main" r:embed="rId5"/>
               </a:ext>
             </a:extLst>
           </a:blip>
@@ -13533,7 +13622,7 @@
         </p:blipFill>
         <p:spPr>
           <a:xfrm>
-            <a:off x="5257800" y="5391150"/>
+            <a:off x="5297556" y="5649564"/>
             <a:ext cx="228600" cy="228600"/>
           </a:xfrm>
           <a:prstGeom prst="rect">
@@ -13557,7 +13646,7 @@
         </p:nvSpPr>
         <p:spPr>
           <a:xfrm>
-            <a:off x="5581650" y="5354574"/>
+            <a:off x="5621406" y="5612988"/>
             <a:ext cx="1219200" cy="247650"/>
           </a:xfrm>
           <a:prstGeom prst="rect">
@@ -13607,7 +13696,7 @@
         </p:nvSpPr>
         <p:spPr>
           <a:xfrm>
-            <a:off x="7219950" y="5276850"/>
+            <a:off x="7180194" y="5535264"/>
             <a:ext cx="1809750" cy="438150"/>
           </a:xfrm>
           <a:prstGeom prst="roundRect">
@@ -13645,7 +13734,7 @@
           <a:blip>
             <a:extLst>
               <a:ext uri="{96DAC541-7B7A-43D3-8B79-37D633B846F1}">
-                <asvg:svgBlip xmlns:asvg="http://schemas.microsoft.com/office/drawing/2016/SVG/main" r:embed="rId8"/>
+                <asvg:svgBlip xmlns:asvg="http://schemas.microsoft.com/office/drawing/2016/SVG/main" r:embed="rId6"/>
               </a:ext>
             </a:extLst>
           </a:blip>
@@ -13653,7 +13742,7 @@
         </p:blipFill>
         <p:spPr>
           <a:xfrm>
-            <a:off x="7372350" y="5391150"/>
+            <a:off x="7521435" y="5649564"/>
             <a:ext cx="228600" cy="228600"/>
           </a:xfrm>
           <a:prstGeom prst="rect">
@@ -13677,7 +13766,7 @@
         </p:nvSpPr>
         <p:spPr>
           <a:xfrm>
-            <a:off x="7696200" y="5354574"/>
+            <a:off x="7865163" y="5612988"/>
             <a:ext cx="1219200" cy="247650"/>
           </a:xfrm>
           <a:prstGeom prst="rect">
@@ -13727,7 +13816,7 @@
         </p:nvSpPr>
         <p:spPr>
           <a:xfrm>
-            <a:off x="9334500" y="5276850"/>
+            <a:off x="9220199" y="5535264"/>
             <a:ext cx="1809750" cy="438150"/>
           </a:xfrm>
           <a:prstGeom prst="roundRect">
@@ -13765,7 +13854,7 @@
           <a:blip>
             <a:extLst>
               <a:ext uri="{96DAC541-7B7A-43D3-8B79-37D633B846F1}">
-                <asvg:svgBlip xmlns:asvg="http://schemas.microsoft.com/office/drawing/2016/SVG/main" r:embed="rId9"/>
+                <asvg:svgBlip xmlns:asvg="http://schemas.microsoft.com/office/drawing/2016/SVG/main" r:embed="rId7"/>
               </a:ext>
             </a:extLst>
           </a:blip>
@@ -13773,7 +13862,7 @@
         </p:blipFill>
         <p:spPr>
           <a:xfrm>
-            <a:off x="9486900" y="5391150"/>
+            <a:off x="9486900" y="5649564"/>
             <a:ext cx="228600" cy="228600"/>
           </a:xfrm>
           <a:prstGeom prst="rect">
@@ -13797,7 +13886,7 @@
         </p:nvSpPr>
         <p:spPr>
           <a:xfrm>
-            <a:off x="9810750" y="5354574"/>
+            <a:off x="9790872" y="5612988"/>
             <a:ext cx="1219200" cy="247650"/>
           </a:xfrm>
           <a:prstGeom prst="rect">
@@ -13991,7 +14080,7 @@
           <p:nvPr/>
         </p:nvPicPr>
         <p:blipFill>
-          <a:blip r:embed="rId10">
+          <a:blip r:embed="rId8">
             <a:extLst>
               <a:ext uri="{28A0092B-C50C-407E-A947-70E740481C1C}">
                 <a14:useLocalDpi xmlns:a14="http://schemas.microsoft.com/office/drawing/2010/main" val="0"/>
@@ -14006,6 +14095,79 @@
           <a:xfrm>
             <a:off x="10820400" y="326316"/>
             <a:ext cx="1156607" cy="397584"/>
+          </a:xfrm>
+          <a:prstGeom prst="rect">
+            <a:avLst/>
+          </a:prstGeom>
+        </p:spPr>
+      </p:pic>
+      <p:pic>
+        <p:nvPicPr>
+          <p:cNvPr id="29" name="Graphic 28">
+            <a:extLst>
+              <a:ext uri="{FF2B5EF4-FFF2-40B4-BE49-F238E27FC236}">
+                <a16:creationId xmlns:a16="http://schemas.microsoft.com/office/drawing/2014/main" id="{346BF6C5-01F1-6E70-8CD9-8DACB7FF15B0}"/>
+              </a:ext>
+            </a:extLst>
+          </p:cNvPr>
+          <p:cNvPicPr>
+            <a:picLocks noChangeAspect="1"/>
+          </p:cNvPicPr>
+          <p:nvPr/>
+        </p:nvPicPr>
+        <p:blipFill>
+          <a:blip>
+            <a:extLst>
+              <a:ext uri="{96DAC541-7B7A-43D3-8B79-37D633B846F1}">
+                <asvg:svgBlip xmlns:asvg="http://schemas.microsoft.com/office/drawing/2016/SVG/main" r:embed="rId9"/>
+              </a:ext>
+            </a:extLst>
+          </a:blip>
+          <a:srcRect l="3347" t="2982" r="3135" b="14311"/>
+          <a:stretch>
+            <a:fillRect/>
+          </a:stretch>
+        </p:blipFill>
+        <p:spPr>
+          <a:xfrm>
+            <a:off x="6591300" y="1349325"/>
+            <a:ext cx="3994833" cy="3518367"/>
+          </a:xfrm>
+          <a:prstGeom prst="rect">
+            <a:avLst/>
+          </a:prstGeom>
+        </p:spPr>
+      </p:pic>
+      <p:pic>
+        <p:nvPicPr>
+          <p:cNvPr id="38" name="Graphic 37">
+            <a:extLst>
+              <a:ext uri="{FF2B5EF4-FFF2-40B4-BE49-F238E27FC236}">
+                <a16:creationId xmlns:a16="http://schemas.microsoft.com/office/drawing/2014/main" id="{25DEFD14-69E7-E8DD-F30D-22818F14552A}"/>
+              </a:ext>
+            </a:extLst>
+          </p:cNvPr>
+          <p:cNvPicPr>
+            <a:picLocks noChangeAspect="1"/>
+          </p:cNvPicPr>
+          <p:nvPr/>
+        </p:nvPicPr>
+        <p:blipFill>
+          <a:blip>
+            <a:extLst>
+              <a:ext uri="{96DAC541-7B7A-43D3-8B79-37D633B846F1}">
+                <asvg:svgBlip xmlns:asvg="http://schemas.microsoft.com/office/drawing/2016/SVG/main" r:embed="rId10"/>
+              </a:ext>
+            </a:extLst>
+          </a:blip>
+          <a:stretch>
+            <a:fillRect/>
+          </a:stretch>
+        </p:blipFill>
+        <p:spPr>
+          <a:xfrm>
+            <a:off x="629804" y="1429571"/>
+            <a:ext cx="5151504" cy="3311393"/>
           </a:xfrm>
           <a:prstGeom prst="rect">
             <a:avLst/>
@@ -14227,8 +14389,8 @@
         </p:nvSpPr>
         <p:spPr>
           <a:xfrm>
-            <a:off x="704850" y="1409700"/>
-            <a:ext cx="4572000" cy="838200"/>
+            <a:off x="754545" y="1409699"/>
+            <a:ext cx="3931755" cy="923925"/>
           </a:xfrm>
           <a:prstGeom prst="roundRect">
             <a:avLst>
@@ -14281,7 +14443,7 @@
         </p:nvSpPr>
         <p:spPr>
           <a:xfrm>
-            <a:off x="914400" y="1638300"/>
+            <a:off x="964095" y="1638300"/>
             <a:ext cx="495300" cy="495300"/>
           </a:xfrm>
           <a:prstGeom prst="ellipse">
@@ -14325,7 +14487,7 @@
         </p:blipFill>
         <p:spPr>
           <a:xfrm>
-            <a:off x="1038225" y="1762125"/>
+            <a:off x="1087920" y="1762125"/>
             <a:ext cx="247650" cy="247650"/>
           </a:xfrm>
           <a:prstGeom prst="rect">
@@ -14349,7 +14511,7 @@
         </p:nvSpPr>
         <p:spPr>
           <a:xfrm>
-            <a:off x="1600200" y="1601724"/>
+            <a:off x="1649895" y="1601724"/>
             <a:ext cx="3467100" cy="285750"/>
           </a:xfrm>
           <a:prstGeom prst="rect">
@@ -14399,8 +14561,8 @@
         </p:nvSpPr>
         <p:spPr>
           <a:xfrm>
-            <a:off x="1600200" y="1898523"/>
-            <a:ext cx="3467100" cy="514350"/>
+            <a:off x="1649895" y="1898523"/>
+            <a:ext cx="3467100" cy="292227"/>
           </a:xfrm>
           <a:prstGeom prst="rect">
             <a:avLst/>
@@ -14449,8 +14611,8 @@
         </p:nvSpPr>
         <p:spPr>
           <a:xfrm>
-            <a:off x="704850" y="2457450"/>
-            <a:ext cx="4572000" cy="838200"/>
+            <a:off x="754545" y="2477328"/>
+            <a:ext cx="3931755" cy="904874"/>
           </a:xfrm>
           <a:prstGeom prst="roundRect">
             <a:avLst>
@@ -14503,7 +14665,7 @@
         </p:nvSpPr>
         <p:spPr>
           <a:xfrm>
-            <a:off x="914400" y="2686050"/>
+            <a:off x="964095" y="2705928"/>
             <a:ext cx="495300" cy="495300"/>
           </a:xfrm>
           <a:prstGeom prst="ellipse">
@@ -14547,7 +14709,7 @@
         </p:blipFill>
         <p:spPr>
           <a:xfrm>
-            <a:off x="1038225" y="2809875"/>
+            <a:off x="1087920" y="2829753"/>
             <a:ext cx="247650" cy="247650"/>
           </a:xfrm>
           <a:prstGeom prst="rect">
@@ -14571,7 +14733,7 @@
         </p:nvSpPr>
         <p:spPr>
           <a:xfrm>
-            <a:off x="1600200" y="2649474"/>
+            <a:off x="1649895" y="2669352"/>
             <a:ext cx="3467100" cy="285750"/>
           </a:xfrm>
           <a:prstGeom prst="rect">
@@ -14621,8 +14783,8 @@
         </p:nvSpPr>
         <p:spPr>
           <a:xfrm>
-            <a:off x="1600200" y="2946273"/>
-            <a:ext cx="3467100" cy="514350"/>
+            <a:off x="1649895" y="2966151"/>
+            <a:ext cx="3467100" cy="292227"/>
           </a:xfrm>
           <a:prstGeom prst="rect">
             <a:avLst/>
@@ -14671,8 +14833,8 @@
         </p:nvSpPr>
         <p:spPr>
           <a:xfrm>
-            <a:off x="704850" y="3505200"/>
-            <a:ext cx="4572000" cy="838200"/>
+            <a:off x="754545" y="3525078"/>
+            <a:ext cx="3931755" cy="933450"/>
           </a:xfrm>
           <a:prstGeom prst="roundRect">
             <a:avLst>
@@ -14725,7 +14887,7 @@
         </p:nvSpPr>
         <p:spPr>
           <a:xfrm>
-            <a:off x="914400" y="3733800"/>
+            <a:off x="964095" y="3753678"/>
             <a:ext cx="495300" cy="495300"/>
           </a:xfrm>
           <a:prstGeom prst="ellipse">
@@ -14769,7 +14931,7 @@
         </p:blipFill>
         <p:spPr>
           <a:xfrm>
-            <a:off x="1038225" y="3857625"/>
+            <a:off x="1087920" y="3877503"/>
             <a:ext cx="247650" cy="247650"/>
           </a:xfrm>
           <a:prstGeom prst="rect">
@@ -14793,7 +14955,7 @@
         </p:nvSpPr>
         <p:spPr>
           <a:xfrm>
-            <a:off x="1600200" y="3697224"/>
+            <a:off x="1649895" y="3717102"/>
             <a:ext cx="3467100" cy="285750"/>
           </a:xfrm>
           <a:prstGeom prst="rect">
@@ -14843,8 +15005,8 @@
         </p:nvSpPr>
         <p:spPr>
           <a:xfrm>
-            <a:off x="1600200" y="3994023"/>
-            <a:ext cx="3467100" cy="514350"/>
+            <a:off x="1649895" y="4013901"/>
+            <a:ext cx="3467100" cy="292227"/>
           </a:xfrm>
           <a:prstGeom prst="rect">
             <a:avLst/>
@@ -14893,8 +15055,8 @@
         </p:nvSpPr>
         <p:spPr>
           <a:xfrm>
-            <a:off x="704850" y="4552950"/>
-            <a:ext cx="4572000" cy="838200"/>
+            <a:off x="754545" y="4612583"/>
+            <a:ext cx="3931755" cy="933450"/>
           </a:xfrm>
           <a:prstGeom prst="roundRect">
             <a:avLst>
@@ -14947,7 +15109,7 @@
         </p:nvSpPr>
         <p:spPr>
           <a:xfrm>
-            <a:off x="914400" y="4781550"/>
+            <a:off x="964095" y="4841184"/>
             <a:ext cx="495300" cy="495300"/>
           </a:xfrm>
           <a:prstGeom prst="ellipse">
@@ -14991,7 +15153,7 @@
         </p:blipFill>
         <p:spPr>
           <a:xfrm>
-            <a:off x="1038225" y="4905375"/>
+            <a:off x="1087920" y="4965009"/>
             <a:ext cx="247650" cy="247650"/>
           </a:xfrm>
           <a:prstGeom prst="rect">
@@ -15015,7 +15177,7 @@
         </p:nvSpPr>
         <p:spPr>
           <a:xfrm>
-            <a:off x="1600200" y="4744974"/>
+            <a:off x="1649895" y="4804608"/>
             <a:ext cx="3467100" cy="285750"/>
           </a:xfrm>
           <a:prstGeom prst="rect">
@@ -15065,8 +15227,8 @@
         </p:nvSpPr>
         <p:spPr>
           <a:xfrm>
-            <a:off x="1600200" y="5041773"/>
-            <a:ext cx="3467100" cy="514350"/>
+            <a:off x="1649895" y="5101407"/>
+            <a:ext cx="3467100" cy="285750"/>
           </a:xfrm>
           <a:prstGeom prst="rect">
             <a:avLst/>
@@ -15115,8 +15277,8 @@
         </p:nvSpPr>
         <p:spPr>
           <a:xfrm>
-            <a:off x="5886450" y="1466850"/>
-            <a:ext cx="5372100" cy="3257550"/>
+            <a:off x="4895851" y="1409699"/>
+            <a:ext cx="6381750" cy="4136333"/>
           </a:xfrm>
           <a:prstGeom prst="roundRect">
             <a:avLst>
@@ -15153,130 +15315,6 @@
           </a:p>
         </p:txBody>
       </p:sp>
-      <p:pic>
-        <p:nvPicPr>
-          <p:cNvPr id="54" name="Picture 53"/>
-          <p:cNvPicPr>
-            <a:picLocks noChangeAspect="1"/>
-          </p:cNvPicPr>
-          <p:nvPr/>
-        </p:nvPicPr>
-        <p:blipFill>
-          <a:blip r:embed="rId7"/>
-          <a:stretch/>
-        </p:blipFill>
-        <p:spPr>
-          <a:xfrm>
-            <a:off x="6216824" y="1638300"/>
-            <a:ext cx="4711352" cy="2914650"/>
-          </a:xfrm>
-          <a:prstGeom prst="roundRect">
-            <a:avLst>
-              <a:gd name="adj" fmla="val 2614"/>
-            </a:avLst>
-          </a:prstGeom>
-        </p:spPr>
-      </p:pic>
-      <p:sp>
-        <p:nvSpPr>
-          <p:cNvPr id="26" name="Rectangle 25">
-            <a:extLst>
-              <a:ext uri="{FF2B5EF4-FFF2-40B4-BE49-F238E27FC236}">
-                <a16:creationId xmlns:a16="http://schemas.microsoft.com/office/drawing/2014/main" id="{AB40A742-191F-40E6-BD9E-FE2563E68BDF}"/>
-              </a:ext>
-            </a:extLst>
-          </p:cNvPr>
-          <p:cNvSpPr>
-            <a:spLocks noGrp="1"/>
-          </p:cNvSpPr>
-          <p:nvPr/>
-        </p:nvSpPr>
-        <p:spPr>
-          <a:xfrm>
-            <a:off x="6076950" y="4972050"/>
-            <a:ext cx="4953000" cy="285750"/>
-          </a:xfrm>
-          <a:prstGeom prst="rect">
-            <a:avLst/>
-          </a:prstGeom>
-          <a:noFill/>
-          <a:ln w="0">
-            <a:noFill/>
-            <a:prstDash val="solid"/>
-          </a:ln>
-        </p:spPr>
-        <p:txBody>
-          <a:bodyPr/>
-          <a:lstStyle/>
-          <a:p>
-            <a:pPr algn="ctr">
-              <a:defRPr sz="1575" b="1">
-                <a:solidFill>
-                  <a:srgbClr val="083344"/>
-                </a:solidFill>
-              </a:defRPr>
-            </a:pPr>
-            <a:r>
-              <a:rPr sz="1575" b="1">
-                <a:solidFill>
-                  <a:srgbClr val="083344"/>
-                </a:solidFill>
-              </a:rPr>
-              <a:t>Component view supports modular reasoning.</a:t>
-            </a:r>
-          </a:p>
-        </p:txBody>
-      </p:sp>
-      <p:sp>
-        <p:nvSpPr>
-          <p:cNvPr id="27" name="Rectangle 26">
-            <a:extLst>
-              <a:ext uri="{FF2B5EF4-FFF2-40B4-BE49-F238E27FC236}">
-                <a16:creationId xmlns:a16="http://schemas.microsoft.com/office/drawing/2014/main" id="{83365F90-DB3B-45E7-A273-E8F340872D63}"/>
-              </a:ext>
-            </a:extLst>
-          </p:cNvPr>
-          <p:cNvSpPr>
-            <a:spLocks noGrp="1"/>
-          </p:cNvSpPr>
-          <p:nvPr/>
-        </p:nvSpPr>
-        <p:spPr>
-          <a:xfrm>
-            <a:off x="6286500" y="5314950"/>
-            <a:ext cx="4533900" cy="266700"/>
-          </a:xfrm>
-          <a:prstGeom prst="rect">
-            <a:avLst/>
-          </a:prstGeom>
-          <a:noFill/>
-          <a:ln w="0">
-            <a:noFill/>
-            <a:prstDash val="solid"/>
-          </a:ln>
-        </p:spPr>
-        <p:txBody>
-          <a:bodyPr/>
-          <a:lstStyle/>
-          <a:p>
-            <a:pPr algn="ctr">
-              <a:defRPr sz="1350" b="0">
-                <a:solidFill>
-                  <a:srgbClr val="5B6B78"/>
-                </a:solidFill>
-              </a:defRPr>
-            </a:pPr>
-            <a:r>
-              <a:rPr sz="1350" b="0">
-                <a:solidFill>
-                  <a:srgbClr val="5B6B78"/>
-                </a:solidFill>
-              </a:rPr>
-              <a:t>Class model kept as supporting design evidence.</a:t>
-            </a:r>
-          </a:p>
-        </p:txBody>
-      </p:sp>
       <p:sp>
         <p:nvSpPr>
           <p:cNvPr id="28" name="Rectangle 27">
@@ -15437,7 +15475,7 @@
           <p:nvPr/>
         </p:nvPicPr>
         <p:blipFill>
-          <a:blip r:embed="rId8">
+          <a:blip r:embed="rId7">
             <a:extLst>
               <a:ext uri="{28A0092B-C50C-407E-A947-70E740481C1C}">
                 <a14:useLocalDpi xmlns:a14="http://schemas.microsoft.com/office/drawing/2010/main" val="0"/>
@@ -15452,6 +15490,42 @@
           <a:xfrm>
             <a:off x="10820400" y="326316"/>
             <a:ext cx="1156607" cy="397584"/>
+          </a:xfrm>
+          <a:prstGeom prst="rect">
+            <a:avLst/>
+          </a:prstGeom>
+        </p:spPr>
+      </p:pic>
+      <p:pic>
+        <p:nvPicPr>
+          <p:cNvPr id="30" name="Graphic 29">
+            <a:extLst>
+              <a:ext uri="{FF2B5EF4-FFF2-40B4-BE49-F238E27FC236}">
+                <a16:creationId xmlns:a16="http://schemas.microsoft.com/office/drawing/2014/main" id="{60858F35-4581-7E66-C561-A934478E9CD8}"/>
+              </a:ext>
+            </a:extLst>
+          </p:cNvPr>
+          <p:cNvPicPr>
+            <a:picLocks noChangeAspect="1"/>
+          </p:cNvPicPr>
+          <p:nvPr/>
+        </p:nvPicPr>
+        <p:blipFill>
+          <a:blip>
+            <a:extLst>
+              <a:ext uri="{96DAC541-7B7A-43D3-8B79-37D633B846F1}">
+                <asvg:svgBlip xmlns:asvg="http://schemas.microsoft.com/office/drawing/2016/SVG/main" r:embed="rId8"/>
+              </a:ext>
+            </a:extLst>
+          </a:blip>
+          <a:stretch>
+            <a:fillRect/>
+          </a:stretch>
+        </p:blipFill>
+        <p:spPr>
+          <a:xfrm>
+            <a:off x="4957555" y="1665930"/>
+            <a:ext cx="6258341" cy="3617976"/>
           </a:xfrm>
           <a:prstGeom prst="rect">
             <a:avLst/>
